--- a/Presentations/SafeStore_Methodology_Review.pptx
+++ b/Presentations/SafeStore_Methodology_Review.pptx
@@ -5,7 +5,7 @@
     <p:sldMasterId id="2147483648" r:id="rId1"/>
   </p:sldMasterIdLst>
   <p:notesMasterIdLst>
-    <p:notesMasterId r:id="rId10"/>
+    <p:notesMasterId r:id="rId9"/>
   </p:notesMasterIdLst>
   <p:sldIdLst>
     <p:sldId id="256" r:id="rId3"/>
@@ -14,7 +14,6 @@
     <p:sldId id="259" r:id="rId6"/>
     <p:sldId id="260" r:id="rId7"/>
     <p:sldId id="261" r:id="rId8"/>
-    <p:sldId id="262" r:id="rId9"/>
   </p:sldIdLst>
   <p:sldSz cx="12192000" cy="6858000"/>
   <p:notesSz cx="6858000" cy="12192000"/>
@@ -113,427 +112,6 @@
 </p:presentation>
 </file>
 
-<file path=ppt/charts/chart1.xml><?xml version="1.0" encoding="utf-8"?>
-<c:chartSpace xmlns:c="http://schemas.openxmlformats.org/drawingml/2006/chart" xmlns:a="http://schemas.openxmlformats.org/drawingml/2006/main" xmlns:r="http://schemas.openxmlformats.org/officeDocument/2006/relationships" xmlns:mc="http://schemas.openxmlformats.org/markup-compatibility/2006" xmlns:c15="http://schemas.microsoft.com/office/drawing/2012/chart" xmlns:c14="http://schemas.microsoft.com/office/drawing/2007/8/2/chart" xmlns:c16r2="http://schemas.microsoft.com/office/drawing/2015/06/chart">
-  <c:date1904 val="0"/>
-  <c:roundedCorners val="1"/>
-  <mc:AlternateContent>
-    <mc:Choice Requires="c14">
-      <c14:style val="102"/>
-    </mc:Choice>
-    <mc:Fallback>
-      <c:style val="2"/>
-    </mc:Fallback>
-  </mc:AlternateContent>
-  <c:chart>
-    <c:title>
-      <c:tx>
-        <c:rich>
-          <a:bodyPr/>
-          <a:lstStyle/>
-          <a:p>
-            <a:pPr>
-              <a:defRPr sz="1400" b="0" i="0" u="none" strike="noStrike">
-                <a:solidFill>
-                  <a:srgbClr val="0F1C2B"/>
-                </a:solidFill>
-                <a:latin typeface="Arial"/>
-              </a:defRPr>
-            </a:pPr>
-            <a:r>
-              <a:rPr sz="1400" b="0" i="0" u="none" strike="noStrike">
-                <a:solidFill>
-                  <a:srgbClr val="0F1C2B"/>
-                </a:solidFill>
-                <a:latin typeface="Arial"/>
-              </a:rPr>
-              <a:t>Backup size (MB)</a:t>
-            </a:r>
-            <a:endParaRPr/>
-          </a:p>
-        </c:rich>
-      </c:tx>
-      <c:layout/>
-      <c:overlay val="0"/>
-    </c:title>
-    <c:autoTitleDeleted val="0"/>
-    <c:plotArea>
-      <c:layout/>
-      <c:barChart>
-        <c:barDir val="col"/>
-        <c:grouping val="clustered"/>
-        <c:varyColors val="0"/>
-        <c:ser>
-          <c:idx val="0"/>
-          <c:order val="0"/>
-          <c:tx>
-            <c:strRef>
-              <c:f>Sheet1!$B$1</c:f>
-              <c:strCache>
-                <c:ptCount val="1"/>
-                <c:pt idx="0">
-                  <c:v>Text set</c:v>
-                </c:pt>
-              </c:strCache>
-            </c:strRef>
-          </c:tx>
-          <c:spPr bwMode="auto">
-            <a:prstGeom prst="rect">
-              <a:avLst/>
-            </a:prstGeom>
-            <a:solidFill>
-              <a:srgbClr val="12A58C"/>
-            </a:solidFill>
-            <a:effectLst/>
-          </c:spPr>
-          <c:invertIfNegative val="0"/>
-          <c:dLbls>
-            <c:numFmt formatCode="0.0" sourceLinked="0"/>
-            <c:showBubbleSize val="0"/>
-            <c:showCatName val="0"/>
-            <c:showLeaderLines val="0"/>
-            <c:showLegendKey val="0"/>
-            <c:showPercent val="0"/>
-            <c:showSerName val="0"/>
-            <c:showVal val="1"/>
-            <c:txPr>
-              <a:bodyPr/>
-              <a:lstStyle/>
-              <a:p>
-                <a:pPr>
-                  <a:defRPr sz="1000" b="0" i="0" u="none" strike="noStrike">
-                    <a:solidFill>
-                      <a:srgbClr val="1D2A36"/>
-                    </a:solidFill>
-                    <a:latin typeface="Arial"/>
-                  </a:defRPr>
-                </a:pPr>
-                <a:endParaRPr/>
-              </a:p>
-            </c:txPr>
-          </c:dLbls>
-          <c:cat>
-            <c:multiLvlStrRef>
-              <c:f>Sheet1!$A$2:$A$5</c:f>
-              <c:multiLvlStrCache>
-                <c:ptCount val="4"/>
-                <c:lvl>
-                  <c:pt idx="0">
-                    <c:v>Plain copy</c:v>
-                  </c:pt>
-                  <c:pt idx="1">
-                    <c:v>lz4</c:v>
-                  </c:pt>
-                  <c:pt idx="2">
-                    <c:v>AES</c:v>
-                  </c:pt>
-                  <c:pt idx="3">
-                    <c:v>lz4 + AES</c:v>
-                  </c:pt>
-                </c:lvl>
-              </c:multiLvlStrCache>
-            </c:multiLvlStrRef>
-          </c:cat>
-          <c:val>
-            <c:numRef>
-              <c:f>Sheet1!$B$2:$B$5</c:f>
-              <c:numCache>
-                <c:formatCode>General</c:formatCode>
-                <c:ptCount val="4"/>
-                <c:pt idx="0">
-                  <c:v>51.7</c:v>
-                </c:pt>
-                <c:pt idx="1">
-                  <c:v>22.3</c:v>
-                </c:pt>
-                <c:pt idx="2">
-                  <c:v>51.9</c:v>
-                </c:pt>
-                <c:pt idx="3">
-                  <c:v>22.3</c:v>
-                </c:pt>
-              </c:numCache>
-            </c:numRef>
-          </c:val>
-        </c:ser>
-        <c:ser>
-          <c:idx val="1"/>
-          <c:order val="1"/>
-          <c:tx>
-            <c:strRef>
-              <c:f>Sheet1!$C$1</c:f>
-              <c:strCache>
-                <c:ptCount val="1"/>
-                <c:pt idx="0">
-                  <c:v>Binary set</c:v>
-                </c:pt>
-              </c:strCache>
-            </c:strRef>
-          </c:tx>
-          <c:spPr bwMode="auto">
-            <a:prstGeom prst="rect">
-              <a:avLst/>
-            </a:prstGeom>
-            <a:solidFill>
-              <a:srgbClr val="9AA7B2"/>
-            </a:solidFill>
-            <a:effectLst/>
-          </c:spPr>
-          <c:invertIfNegative val="0"/>
-          <c:dLbls>
-            <c:numFmt formatCode="0.0" sourceLinked="0"/>
-            <c:showBubbleSize val="0"/>
-            <c:showCatName val="0"/>
-            <c:showLeaderLines val="0"/>
-            <c:showLegendKey val="0"/>
-            <c:showPercent val="0"/>
-            <c:showSerName val="0"/>
-            <c:showVal val="1"/>
-            <c:txPr>
-              <a:bodyPr/>
-              <a:lstStyle/>
-              <a:p>
-                <a:pPr>
-                  <a:defRPr sz="1000" b="0" i="0" u="none" strike="noStrike">
-                    <a:solidFill>
-                      <a:srgbClr val="1D2A36"/>
-                    </a:solidFill>
-                    <a:latin typeface="Arial"/>
-                  </a:defRPr>
-                </a:pPr>
-                <a:endParaRPr/>
-              </a:p>
-            </c:txPr>
-          </c:dLbls>
-          <c:cat>
-            <c:multiLvlStrRef>
-              <c:f>Sheet1!$A$2:$A$5</c:f>
-              <c:multiLvlStrCache>
-                <c:ptCount val="4"/>
-                <c:lvl>
-                  <c:pt idx="0">
-                    <c:v>Plain copy</c:v>
-                  </c:pt>
-                  <c:pt idx="1">
-                    <c:v>lz4</c:v>
-                  </c:pt>
-                  <c:pt idx="2">
-                    <c:v>AES</c:v>
-                  </c:pt>
-                  <c:pt idx="3">
-                    <c:v>lz4 + AES</c:v>
-                  </c:pt>
-                </c:lvl>
-              </c:multiLvlStrCache>
-            </c:multiLvlStrRef>
-          </c:cat>
-          <c:val>
-            <c:numRef>
-              <c:f>Sheet1!$C$2:$C$5</c:f>
-              <c:numCache>
-                <c:formatCode>General</c:formatCode>
-                <c:ptCount val="4"/>
-                <c:pt idx="0">
-                  <c:v>50</c:v>
-                </c:pt>
-                <c:pt idx="1">
-                  <c:v>50</c:v>
-                </c:pt>
-                <c:pt idx="2">
-                  <c:v>50</c:v>
-                </c:pt>
-                <c:pt idx="3">
-                  <c:v>50</c:v>
-                </c:pt>
-              </c:numCache>
-            </c:numRef>
-          </c:val>
-        </c:ser>
-        <c:dLbls>
-          <c:numFmt formatCode="0.0" sourceLinked="0"/>
-          <c:showBubbleSize val="0"/>
-          <c:showCatName val="0"/>
-          <c:showLeaderLines val="0"/>
-          <c:showLegendKey val="0"/>
-          <c:showPercent val="0"/>
-          <c:showSerName val="0"/>
-          <c:showVal val="1"/>
-          <c:txPr>
-            <a:bodyPr/>
-            <a:lstStyle/>
-            <a:p>
-              <a:pPr>
-                <a:defRPr sz="1000" b="0" i="0" u="none" strike="noStrike">
-                  <a:solidFill>
-                    <a:srgbClr val="1D2A36"/>
-                  </a:solidFill>
-                  <a:latin typeface="Arial"/>
-                </a:defRPr>
-              </a:pPr>
-              <a:endParaRPr/>
-            </a:p>
-          </c:txPr>
-        </c:dLbls>
-        <c:gapWidth val="60"/>
-        <c:overlap val="0"/>
-        <c:axId val="2094734554"/>
-        <c:axId val="2094734552"/>
-      </c:barChart>
-      <c:catAx>
-        <c:axId val="2094734554"/>
-        <c:scaling>
-          <c:orientation val="minMax"/>
-        </c:scaling>
-        <c:delete val="0"/>
-        <c:axPos val="b"/>
-        <c:numFmt formatCode="General" sourceLinked="1"/>
-        <c:majorTickMark val="out"/>
-        <c:minorTickMark val="none"/>
-        <c:tickLblPos val="low"/>
-        <c:spPr bwMode="auto">
-          <a:prstGeom prst="rect">
-            <a:avLst/>
-          </a:prstGeom>
-          <a:ln w="12700" cap="flat">
-            <a:solidFill>
-              <a:srgbClr val="888888"/>
-            </a:solidFill>
-            <a:prstDash val="solid"/>
-            <a:round/>
-          </a:ln>
-        </c:spPr>
-        <c:txPr>
-          <a:bodyPr/>
-          <a:lstStyle/>
-          <a:p>
-            <a:pPr>
-              <a:defRPr sz="1100" b="0" i="0" u="none" strike="noStrike">
-                <a:solidFill>
-                  <a:srgbClr val="5F6F7E"/>
-                </a:solidFill>
-                <a:latin typeface="Arial"/>
-              </a:defRPr>
-            </a:pPr>
-            <a:endParaRPr lang="en-US"/>
-          </a:p>
-        </c:txPr>
-        <c:crossAx val="2094734552"/>
-        <c:crosses val="autoZero"/>
-        <c:auto val="1"/>
-        <c:lblAlgn val="ctr"/>
-        <c:noMultiLvlLbl val="1"/>
-      </c:catAx>
-      <c:valAx>
-        <c:axId val="2094734552"/>
-        <c:scaling>
-          <c:orientation val="minMax"/>
-          <c:max val="60.000000"/>
-        </c:scaling>
-        <c:delete val="0"/>
-        <c:axPos val="l"/>
-        <c:majorGridlines>
-          <c:spPr bwMode="auto">
-            <a:prstGeom prst="rect">
-              <a:avLst/>
-            </a:prstGeom>
-            <a:ln w="6350" cap="flat">
-              <a:solidFill>
-                <a:srgbClr val="E6ECEF"/>
-              </a:solidFill>
-              <a:prstDash val="solid"/>
-              <a:round/>
-            </a:ln>
-          </c:spPr>
-        </c:majorGridlines>
-        <c:numFmt formatCode="General" sourceLinked="0"/>
-        <c:majorTickMark val="out"/>
-        <c:minorTickMark val="none"/>
-        <c:tickLblPos val="nextTo"/>
-        <c:spPr bwMode="auto">
-          <a:prstGeom prst="rect">
-            <a:avLst/>
-          </a:prstGeom>
-          <a:ln w="12700" cap="flat">
-            <a:solidFill>
-              <a:srgbClr val="888888"/>
-            </a:solidFill>
-            <a:prstDash val="solid"/>
-            <a:round/>
-          </a:ln>
-        </c:spPr>
-        <c:txPr>
-          <a:bodyPr/>
-          <a:lstStyle/>
-          <a:p>
-            <a:pPr>
-              <a:defRPr sz="1000" b="0" i="0" u="none" strike="noStrike">
-                <a:solidFill>
-                  <a:srgbClr val="5F6F7E"/>
-                </a:solidFill>
-                <a:latin typeface="Arial"/>
-              </a:defRPr>
-            </a:pPr>
-            <a:endParaRPr lang="en-US"/>
-          </a:p>
-        </c:txPr>
-        <c:crossAx val="2094734554"/>
-        <c:crosses val="autoZero"/>
-        <c:crossBetween val="between"/>
-      </c:valAx>
-      <c:spPr bwMode="auto">
-        <a:prstGeom prst="rect">
-          <a:avLst/>
-        </a:prstGeom>
-        <a:noFill/>
-        <a:ln>
-          <a:noFill/>
-        </a:ln>
-        <a:effectLst/>
-      </c:spPr>
-    </c:plotArea>
-    <c:legend>
-      <c:legendPos val="b"/>
-      <c:layout/>
-      <c:overlay val="0"/>
-      <c:txPr>
-        <a:bodyPr/>
-        <a:lstStyle/>
-        <a:p>
-          <a:pPr>
-            <a:defRPr sz="1100">
-              <a:solidFill>
-                <a:srgbClr val="1D2A36"/>
-              </a:solidFill>
-            </a:defRPr>
-          </a:pPr>
-          <a:endParaRPr lang="en-US"/>
-        </a:p>
-      </c:txPr>
-    </c:legend>
-    <c:plotVisOnly val="1"/>
-    <c:dispBlanksAs val="span"/>
-    <c:showDLblsOverMax val="0"/>
-  </c:chart>
-  <c:spPr bwMode="auto">
-    <a:xfrm rot="0">
-      <a:off x="4114800" y="1508759"/>
-      <a:ext cx="4663440" cy="4572000"/>
-    </a:xfrm>
-    <a:prstGeom prst="rect">
-      <a:avLst/>
-    </a:prstGeom>
-    <a:noFill/>
-    <a:ln>
-      <a:noFill/>
-    </a:ln>
-    <a:effectLst/>
-  </c:spPr>
-  <c:externalData r:id="rId1">
-    <c:autoUpdate val="1"/>
-  </c:externalData>
-</c:chartSpace>
-</file>
-
 <file path=ppt/notesMasters/notesMaster1.xml><?xml version="1.0" encoding="utf-8"?>
 <p:notesMaster xmlns:a="http://schemas.openxmlformats.org/drawingml/2006/main" xmlns:r="http://schemas.openxmlformats.org/officeDocument/2006/relationships" xmlns:p="http://schemas.openxmlformats.org/presentationml/2006/main">
   <p:cSld name="">
@@ -558,7 +136,7 @@
       </p:grpSpPr>
       <p:sp>
         <p:nvSpPr>
-          <p:cNvPr id="1437466978" name="Header Placeholder 1"/>
+          <p:cNvPr id="2052889418" name="Header Placeholder 1"/>
           <p:cNvSpPr>
             <a:spLocks noGrp="1"/>
           </p:cNvSpPr>
@@ -592,7 +170,7 @@
       </p:sp>
       <p:sp>
         <p:nvSpPr>
-          <p:cNvPr id="1458743448" name="Date Placeholder 2"/>
+          <p:cNvPr id="891981410" name="Date Placeholder 2"/>
           <p:cNvSpPr>
             <a:spLocks noGrp="1"/>
           </p:cNvSpPr>
@@ -630,7 +208,7 @@
       </p:sp>
       <p:sp>
         <p:nvSpPr>
-          <p:cNvPr id="12795737" name="Slide Image Placeholder 3"/>
+          <p:cNvPr id="855427222" name="Slide Image Placeholder 3"/>
           <p:cNvSpPr>
             <a:spLocks noChangeAspect="1" noGrp="1" noRot="1"/>
           </p:cNvSpPr>
@@ -666,7 +244,7 @@
       </p:sp>
       <p:sp>
         <p:nvSpPr>
-          <p:cNvPr id="321394999" name="Notes Placeholder 4"/>
+          <p:cNvPr id="1122094725" name="Notes Placeholder 4"/>
           <p:cNvSpPr>
             <a:spLocks noGrp="1"/>
           </p:cNvSpPr>
@@ -740,7 +318,7 @@
       </p:sp>
       <p:sp>
         <p:nvSpPr>
-          <p:cNvPr id="1638234330" name="Footer Placeholder 5"/>
+          <p:cNvPr id="1108733091" name="Footer Placeholder 5"/>
           <p:cNvSpPr>
             <a:spLocks noGrp="1"/>
           </p:cNvSpPr>
@@ -774,7 +352,7 @@
       </p:sp>
       <p:sp>
         <p:nvSpPr>
-          <p:cNvPr id="587036526" name="Slide Number Placeholder 6"/>
+          <p:cNvPr id="1296975207" name="Slide Number Placeholder 6"/>
           <p:cNvSpPr>
             <a:spLocks noGrp="1"/>
           </p:cNvSpPr>
@@ -927,7 +505,7 @@
       </p:grpSpPr>
       <p:sp>
         <p:nvSpPr>
-          <p:cNvPr id="326919802" name="Slide Image Placeholder 1"/>
+          <p:cNvPr id="1202040975" name="Slide Image Placeholder 1"/>
           <p:cNvSpPr>
             <a:spLocks noChangeAspect="1" noGrp="1" noRot="1"/>
           </p:cNvSpPr>
@@ -939,7 +517,7 @@
       </p:sp>
       <p:sp>
         <p:nvSpPr>
-          <p:cNvPr id="757626096" name="Notes Placeholder 2"/>
+          <p:cNvPr id="113910636" name="Notes Placeholder 2"/>
           <p:cNvSpPr>
             <a:spLocks noGrp="1"/>
           </p:cNvSpPr>
@@ -965,7 +543,7 @@
       </p:sp>
       <p:sp>
         <p:nvSpPr>
-          <p:cNvPr id="1278835074" name="Slide Number Placeholder 3"/>
+          <p:cNvPr id="1014824433" name="Slide Number Placeholder 3"/>
           <p:cNvSpPr>
             <a:spLocks noGrp="1"/>
           </p:cNvSpPr>
@@ -1016,7 +594,7 @@
       </p:grpSpPr>
       <p:sp>
         <p:nvSpPr>
-          <p:cNvPr id="535439679" name="Slide Image Placeholder 1"/>
+          <p:cNvPr id="1475966941" name="Slide Image Placeholder 1"/>
           <p:cNvSpPr>
             <a:spLocks noChangeAspect="1" noGrp="1" noRot="1"/>
           </p:cNvSpPr>
@@ -1028,7 +606,7 @@
       </p:sp>
       <p:sp>
         <p:nvSpPr>
-          <p:cNvPr id="991208359" name="Notes Placeholder 2"/>
+          <p:cNvPr id="1067679613" name="Notes Placeholder 2"/>
           <p:cNvSpPr>
             <a:spLocks noGrp="1"/>
           </p:cNvSpPr>
@@ -1054,7 +632,7 @@
       </p:sp>
       <p:sp>
         <p:nvSpPr>
-          <p:cNvPr id="802308664" name="Slide Number Placeholder 3"/>
+          <p:cNvPr id="503420835" name="Slide Number Placeholder 3"/>
           <p:cNvSpPr>
             <a:spLocks noGrp="1"/>
           </p:cNvSpPr>
@@ -1105,7 +683,7 @@
       </p:grpSpPr>
       <p:sp>
         <p:nvSpPr>
-          <p:cNvPr id="1826159236" name="Slide Image Placeholder 1"/>
+          <p:cNvPr id="1697464175" name="Slide Image Placeholder 1"/>
           <p:cNvSpPr>
             <a:spLocks noChangeAspect="1" noGrp="1" noRot="1"/>
           </p:cNvSpPr>
@@ -1117,7 +695,7 @@
       </p:sp>
       <p:sp>
         <p:nvSpPr>
-          <p:cNvPr id="1533120163" name="Notes Placeholder 2"/>
+          <p:cNvPr id="1695903569" name="Notes Placeholder 2"/>
           <p:cNvSpPr>
             <a:spLocks noGrp="1"/>
           </p:cNvSpPr>
@@ -1143,7 +721,7 @@
       </p:sp>
       <p:sp>
         <p:nvSpPr>
-          <p:cNvPr id="1801160228" name="Slide Number Placeholder 3"/>
+          <p:cNvPr id="1911034614" name="Slide Number Placeholder 3"/>
           <p:cNvSpPr>
             <a:spLocks noGrp="1"/>
           </p:cNvSpPr>
@@ -1194,7 +772,7 @@
       </p:grpSpPr>
       <p:sp>
         <p:nvSpPr>
-          <p:cNvPr id="1256191972" name="Slide Image Placeholder 1"/>
+          <p:cNvPr id="811448319" name="Slide Image Placeholder 1"/>
           <p:cNvSpPr>
             <a:spLocks noChangeAspect="1" noGrp="1" noRot="1"/>
           </p:cNvSpPr>
@@ -1206,7 +784,7 @@
       </p:sp>
       <p:sp>
         <p:nvSpPr>
-          <p:cNvPr id="841731005" name="Notes Placeholder 2"/>
+          <p:cNvPr id="1923688350" name="Notes Placeholder 2"/>
           <p:cNvSpPr>
             <a:spLocks noGrp="1"/>
           </p:cNvSpPr>
@@ -1232,7 +810,7 @@
       </p:sp>
       <p:sp>
         <p:nvSpPr>
-          <p:cNvPr id="1113274745" name="Slide Number Placeholder 3"/>
+          <p:cNvPr id="1818074609" name="Slide Number Placeholder 3"/>
           <p:cNvSpPr>
             <a:spLocks noGrp="1"/>
           </p:cNvSpPr>
@@ -1283,7 +861,7 @@
       </p:grpSpPr>
       <p:sp>
         <p:nvSpPr>
-          <p:cNvPr id="1972598575" name="Slide Image Placeholder 1"/>
+          <p:cNvPr id="866516306" name="Slide Image Placeholder 1"/>
           <p:cNvSpPr>
             <a:spLocks noChangeAspect="1" noGrp="1" noRot="1"/>
           </p:cNvSpPr>
@@ -1295,7 +873,7 @@
       </p:sp>
       <p:sp>
         <p:nvSpPr>
-          <p:cNvPr id="1254817668" name="Notes Placeholder 2"/>
+          <p:cNvPr id="1296538436" name="Notes Placeholder 2"/>
           <p:cNvSpPr>
             <a:spLocks noGrp="1"/>
           </p:cNvSpPr>
@@ -1313,7 +891,7 @@
             </a:pPr>
             <a:r>
               <a:rPr lang="en-US"/>
-              <a:t>These numbers come from running the compiled binary. Text data compressed from 51.7 MB to 22.3 MB. Random data did not compress, which justifies making -c optional. All 8 restores matched the originals exactly. AES adds only a small header and padding.</a:t>
+              <a:t>Accessibility is strong by design: open formats mean nobody is locked in. Dissemination is the weakest area today, so present the concrete plan: README, licence, man page, packages, and a demo video.</a:t>
             </a:r>
             <a:endParaRPr lang="en-US"/>
           </a:p>
@@ -1321,7 +899,7 @@
       </p:sp>
       <p:sp>
         <p:nvSpPr>
-          <p:cNvPr id="1106759073" name="Slide Number Placeholder 3"/>
+          <p:cNvPr id="1537170659" name="Slide Number Placeholder 3"/>
           <p:cNvSpPr>
             <a:spLocks noGrp="1"/>
           </p:cNvSpPr>
@@ -1339,7 +917,7 @@
             </a:pPr>
             <a:fld id="{F7021451-1387-4CA6-816F-3879F97B5CBC}" type="slidenum">
               <a:rPr lang="en-US"/>
-              <a:t>5</a:t>
+              <a:t>6</a:t>
             </a:fld>
             <a:endParaRPr lang="en-US"/>
           </a:p>
@@ -1372,7 +950,7 @@
       </p:grpSpPr>
       <p:sp>
         <p:nvSpPr>
-          <p:cNvPr id="991650240" name="Slide Image Placeholder 1"/>
+          <p:cNvPr id="2016551213" name="Slide Image Placeholder 1"/>
           <p:cNvSpPr>
             <a:spLocks noChangeAspect="1" noGrp="1" noRot="1"/>
           </p:cNvSpPr>
@@ -1384,7 +962,7 @@
       </p:sp>
       <p:sp>
         <p:nvSpPr>
-          <p:cNvPr id="8114054" name="Notes Placeholder 2"/>
+          <p:cNvPr id="175575428" name="Notes Placeholder 2"/>
           <p:cNvSpPr>
             <a:spLocks noGrp="1"/>
           </p:cNvSpPr>
@@ -1402,7 +980,7 @@
             </a:pPr>
             <a:r>
               <a:rPr lang="en-US"/>
-              <a:t>Accessibility is strong by design: open formats mean nobody is locked in. Dissemination is the weakest area today, so present the concrete plan: README, licence, man page, packages, and a demo video.</a:t>
+              <a:t>Summarise one point per criterion, then close with future work and invite questions.</a:t>
             </a:r>
             <a:endParaRPr lang="en-US"/>
           </a:p>
@@ -1410,96 +988,7 @@
       </p:sp>
       <p:sp>
         <p:nvSpPr>
-          <p:cNvPr id="170676839" name="Slide Number Placeholder 3"/>
-          <p:cNvSpPr>
-            <a:spLocks noGrp="1"/>
-          </p:cNvSpPr>
-          <p:nvPr>
-            <p:ph type="sldNum" sz="quarter" idx="10"/>
-          </p:nvPr>
-        </p:nvSpPr>
-        <p:spPr bwMode="auto"/>
-        <p:txBody>
-          <a:bodyPr/>
-          <a:lstStyle/>
-          <a:p>
-            <a:pPr>
-              <a:defRPr/>
-            </a:pPr>
-            <a:fld id="{F7021451-1387-4CA6-816F-3879F97B5CBC}" type="slidenum">
-              <a:rPr lang="en-US"/>
-              <a:t>6</a:t>
-            </a:fld>
-            <a:endParaRPr lang="en-US"/>
-          </a:p>
-        </p:txBody>
-      </p:sp>
-    </p:spTree>
-  </p:cSld>
-  <p:clrMapOvr>
-    <a:masterClrMapping/>
-  </p:clrMapOvr>
-</p:notes>
-</file>
-
-<file path=ppt/notesSlides/notesSlide7.xml><?xml version="1.0" encoding="utf-8"?>
-<p:notes xmlns:a="http://schemas.openxmlformats.org/drawingml/2006/main" xmlns:r="http://schemas.openxmlformats.org/officeDocument/2006/relationships" xmlns:p="http://schemas.openxmlformats.org/presentationml/2006/main" xmlns:m="http://schemas.openxmlformats.org/officeDocument/2006/math" xmlns:w="http://schemas.openxmlformats.org/wordprocessingml/2006/main">
-  <p:cSld name="">
-    <p:spTree>
-      <p:nvGrpSpPr>
-        <p:cNvPr id="1" name=""/>
-        <p:cNvGrpSpPr/>
-        <p:nvPr/>
-      </p:nvGrpSpPr>
-      <p:grpSpPr bwMode="auto">
-        <a:xfrm>
-          <a:off x="0" y="0"/>
-          <a:ext cx="0" cy="0"/>
-          <a:chOff x="0" y="0"/>
-          <a:chExt cx="0" cy="0"/>
-        </a:xfrm>
-      </p:grpSpPr>
-      <p:sp>
-        <p:nvSpPr>
-          <p:cNvPr id="995745141" name="Slide Image Placeholder 1"/>
-          <p:cNvSpPr>
-            <a:spLocks noChangeAspect="1" noGrp="1" noRot="1"/>
-          </p:cNvSpPr>
-          <p:nvPr>
-            <p:ph type="sldImg"/>
-          </p:nvPr>
-        </p:nvSpPr>
-        <p:spPr bwMode="auto"/>
-      </p:sp>
-      <p:sp>
-        <p:nvSpPr>
-          <p:cNvPr id="446191457" name="Notes Placeholder 2"/>
-          <p:cNvSpPr>
-            <a:spLocks noGrp="1"/>
-          </p:cNvSpPr>
-          <p:nvPr>
-            <p:ph type="body" idx="1"/>
-          </p:nvPr>
-        </p:nvSpPr>
-        <p:spPr bwMode="auto"/>
-        <p:txBody>
-          <a:bodyPr/>
-          <a:lstStyle/>
-          <a:p>
-            <a:pPr>
-              <a:defRPr/>
-            </a:pPr>
-            <a:r>
-              <a:rPr lang="en-US"/>
-              <a:t>Summarise one point per criterion, then close with future work and invite questions.</a:t>
-            </a:r>
-            <a:endParaRPr lang="en-US"/>
-          </a:p>
-        </p:txBody>
-      </p:sp>
-      <p:sp>
-        <p:nvSpPr>
-          <p:cNvPr id="1399727752" name="Slide Number Placeholder 3"/>
+          <p:cNvPr id="1331014098" name="Slide Number Placeholder 3"/>
           <p:cNvSpPr>
             <a:spLocks noGrp="1"/>
           </p:cNvSpPr>
@@ -1864,7 +1353,7 @@
       </p:grpSpPr>
       <p:sp>
         <p:nvSpPr>
-          <p:cNvPr id="155740174" name="Shape 0"/>
+          <p:cNvPr id="228666581" name="Shape 0"/>
           <p:cNvSpPr/>
           <p:nvPr/>
         </p:nvSpPr>
@@ -1889,7 +1378,7 @@
       </p:sp>
       <p:pic>
         <p:nvPicPr>
-          <p:cNvPr id="877115691" name="Image 0" descr="preencoded.png"/>
+          <p:cNvPr id="1118858376" name="Image 0" descr="preencoded.png"/>
           <p:cNvPicPr>
             <a:picLocks noChangeAspect="1"/>
           </p:cNvPicPr>
@@ -1911,7 +1400,7 @@
       </p:pic>
       <p:sp>
         <p:nvSpPr>
-          <p:cNvPr id="1608584762" name="Text 1"/>
+          <p:cNvPr id="1745531976" name="Text 1"/>
           <p:cNvSpPr txBox="1"/>
           <p:nvPr/>
         </p:nvSpPr>
@@ -1951,7 +1440,7 @@
       </p:sp>
       <p:sp>
         <p:nvSpPr>
-          <p:cNvPr id="1855714899" name="Text 2"/>
+          <p:cNvPr id="362927913" name="Text 2"/>
           <p:cNvSpPr txBox="1"/>
           <p:nvPr/>
         </p:nvSpPr>
@@ -1991,7 +1480,7 @@
       </p:sp>
       <p:sp>
         <p:nvSpPr>
-          <p:cNvPr id="344511577" name="Text 3"/>
+          <p:cNvPr id="1552830071" name="Text 3"/>
           <p:cNvSpPr txBox="1"/>
           <p:nvPr/>
         </p:nvSpPr>
@@ -2031,7 +1520,7 @@
       </p:sp>
       <p:sp>
         <p:nvSpPr>
-          <p:cNvPr id="226085924" name="Shape 4"/>
+          <p:cNvPr id="524613018" name="Shape 4"/>
           <p:cNvSpPr/>
           <p:nvPr/>
         </p:nvSpPr>
@@ -2058,7 +1547,7 @@
       </p:sp>
       <p:sp>
         <p:nvSpPr>
-          <p:cNvPr id="344491713" name="Text 5"/>
+          <p:cNvPr id="2030438258" name="Text 5"/>
           <p:cNvSpPr txBox="1"/>
           <p:nvPr/>
         </p:nvSpPr>
@@ -2142,7 +1631,7 @@
           <a:p>
             <a:pPr marL="0" indent="0">
               <a:spcAft>
-                <a:spcPts val="399"/>
+                <a:spcPts val="398"/>
               </a:spcAft>
               <a:buNone/>
               <a:defRPr/>
@@ -2196,7 +1685,7 @@
       </p:sp>
       <p:sp>
         <p:nvSpPr>
-          <p:cNvPr id="1097839963" name="Shape 6"/>
+          <p:cNvPr id="167316573" name="Shape 6"/>
           <p:cNvSpPr/>
           <p:nvPr/>
         </p:nvSpPr>
@@ -2223,7 +1712,7 @@
       </p:sp>
       <p:sp>
         <p:nvSpPr>
-          <p:cNvPr id="1701144418" name="Text 7"/>
+          <p:cNvPr id="1075641470" name="Text 7"/>
           <p:cNvSpPr txBox="1"/>
           <p:nvPr/>
         </p:nvSpPr>
@@ -2308,7 +1797,7 @@
       </p:sp>
       <p:sp>
         <p:nvSpPr>
-          <p:cNvPr id="1112554421" name="Text 8"/>
+          <p:cNvPr id="922730751" name="Text 8"/>
           <p:cNvSpPr txBox="1"/>
           <p:nvPr/>
         </p:nvSpPr>
@@ -2388,7 +1877,7 @@
       </p:grpSpPr>
       <p:sp>
         <p:nvSpPr>
-          <p:cNvPr id="1789117819" name="Text 0"/>
+          <p:cNvPr id="422363093" name="Text 0"/>
           <p:cNvSpPr txBox="1"/>
           <p:nvPr/>
         </p:nvSpPr>
@@ -2428,7 +1917,7 @@
       </p:sp>
       <p:sp>
         <p:nvSpPr>
-          <p:cNvPr id="1493563518" name="Text 1"/>
+          <p:cNvPr id="265030178" name="Text 1"/>
           <p:cNvSpPr txBox="1"/>
           <p:nvPr/>
         </p:nvSpPr>
@@ -2468,7 +1957,7 @@
       </p:sp>
       <p:sp>
         <p:nvSpPr>
-          <p:cNvPr id="1029476592" name="Shape 2"/>
+          <p:cNvPr id="318154238" name="Shape 2"/>
           <p:cNvSpPr/>
           <p:nvPr/>
         </p:nvSpPr>
@@ -2495,7 +1984,7 @@
       </p:sp>
       <p:sp>
         <p:nvSpPr>
-          <p:cNvPr id="723515281" name="Text 3"/>
+          <p:cNvPr id="90195063" name="Text 3"/>
           <p:cNvSpPr txBox="1"/>
           <p:nvPr/>
         </p:nvSpPr>
@@ -2535,7 +2024,7 @@
       </p:sp>
       <p:sp>
         <p:nvSpPr>
-          <p:cNvPr id="1571561664" name="Text 4"/>
+          <p:cNvPr id="683495949" name="Text 4"/>
           <p:cNvSpPr txBox="1"/>
           <p:nvPr/>
         </p:nvSpPr>
@@ -2575,7 +2064,7 @@
       </p:sp>
       <p:sp>
         <p:nvSpPr>
-          <p:cNvPr id="564433841" name="Text 5"/>
+          <p:cNvPr id="2008000922" name="Text 5"/>
           <p:cNvSpPr txBox="1"/>
           <p:nvPr/>
         </p:nvSpPr>
@@ -2615,7 +2104,7 @@
       </p:sp>
       <p:sp>
         <p:nvSpPr>
-          <p:cNvPr id="534716868" name="Shape 6"/>
+          <p:cNvPr id="1835807089" name="Shape 6"/>
           <p:cNvSpPr/>
           <p:nvPr/>
         </p:nvSpPr>
@@ -2642,7 +2131,7 @@
       </p:sp>
       <p:sp>
         <p:nvSpPr>
-          <p:cNvPr id="1098473955" name="Text 7"/>
+          <p:cNvPr id="521254901" name="Text 7"/>
           <p:cNvSpPr txBox="1"/>
           <p:nvPr/>
         </p:nvSpPr>
@@ -2682,7 +2171,7 @@
       </p:sp>
       <p:sp>
         <p:nvSpPr>
-          <p:cNvPr id="1088953225" name="Text 8"/>
+          <p:cNvPr id="559725191" name="Text 8"/>
           <p:cNvSpPr txBox="1"/>
           <p:nvPr/>
         </p:nvSpPr>
@@ -2722,7 +2211,7 @@
       </p:sp>
       <p:sp>
         <p:nvSpPr>
-          <p:cNvPr id="831291839" name="Text 9"/>
+          <p:cNvPr id="1056456695" name="Text 9"/>
           <p:cNvSpPr txBox="1"/>
           <p:nvPr/>
         </p:nvSpPr>
@@ -2762,7 +2251,7 @@
       </p:sp>
       <p:sp>
         <p:nvSpPr>
-          <p:cNvPr id="194272504" name="Shape 10"/>
+          <p:cNvPr id="2028316015" name="Shape 10"/>
           <p:cNvSpPr/>
           <p:nvPr/>
         </p:nvSpPr>
@@ -2789,7 +2278,7 @@
       </p:sp>
       <p:sp>
         <p:nvSpPr>
-          <p:cNvPr id="673893502" name="Text 11"/>
+          <p:cNvPr id="572430074" name="Text 11"/>
           <p:cNvSpPr txBox="1"/>
           <p:nvPr/>
         </p:nvSpPr>
@@ -2829,7 +2318,7 @@
       </p:sp>
       <p:sp>
         <p:nvSpPr>
-          <p:cNvPr id="1986009193" name="Text 12"/>
+          <p:cNvPr id="1420133618" name="Text 12"/>
           <p:cNvSpPr txBox="1"/>
           <p:nvPr/>
         </p:nvSpPr>
@@ -2869,7 +2358,7 @@
       </p:sp>
       <p:sp>
         <p:nvSpPr>
-          <p:cNvPr id="221985504" name="Text 13"/>
+          <p:cNvPr id="1677232751" name="Text 13"/>
           <p:cNvSpPr txBox="1"/>
           <p:nvPr/>
         </p:nvSpPr>
@@ -2909,7 +2398,7 @@
       </p:sp>
       <p:sp>
         <p:nvSpPr>
-          <p:cNvPr id="1297403048" name="Shape 14"/>
+          <p:cNvPr id="514404328" name="Shape 14"/>
           <p:cNvSpPr/>
           <p:nvPr/>
         </p:nvSpPr>
@@ -2936,7 +2425,7 @@
       </p:sp>
       <p:sp>
         <p:nvSpPr>
-          <p:cNvPr id="251643581" name="Text 15"/>
+          <p:cNvPr id="847240618" name="Text 15"/>
           <p:cNvSpPr txBox="1"/>
           <p:nvPr/>
         </p:nvSpPr>
@@ -2976,7 +2465,7 @@
       </p:sp>
       <p:sp>
         <p:nvSpPr>
-          <p:cNvPr id="1014648655" name="Text 16"/>
+          <p:cNvPr id="20515964" name="Text 16"/>
           <p:cNvSpPr txBox="1"/>
           <p:nvPr/>
         </p:nvSpPr>
@@ -3016,7 +2505,7 @@
       </p:sp>
       <p:sp>
         <p:nvSpPr>
-          <p:cNvPr id="649817490" name="Text 17"/>
+          <p:cNvPr id="1977338374" name="Text 17"/>
           <p:cNvSpPr txBox="1"/>
           <p:nvPr/>
         </p:nvSpPr>
@@ -3056,7 +2545,7 @@
       </p:sp>
       <p:sp>
         <p:nvSpPr>
-          <p:cNvPr id="298863274" name="Shape 18"/>
+          <p:cNvPr id="1206734331" name="Shape 18"/>
           <p:cNvSpPr/>
           <p:nvPr/>
         </p:nvSpPr>
@@ -3083,7 +2572,7 @@
       </p:sp>
       <p:sp>
         <p:nvSpPr>
-          <p:cNvPr id="2108328204" name="Text 19"/>
+          <p:cNvPr id="1678522402" name="Text 19"/>
           <p:cNvSpPr txBox="1"/>
           <p:nvPr/>
         </p:nvSpPr>
@@ -3123,7 +2612,7 @@
       </p:sp>
       <p:sp>
         <p:nvSpPr>
-          <p:cNvPr id="2010138614" name="Text 20"/>
+          <p:cNvPr id="2008715504" name="Text 20"/>
           <p:cNvSpPr txBox="1"/>
           <p:nvPr/>
         </p:nvSpPr>
@@ -3163,7 +2652,7 @@
       </p:sp>
       <p:sp>
         <p:nvSpPr>
-          <p:cNvPr id="1987227473" name="Text 21"/>
+          <p:cNvPr id="1156516331" name="Text 21"/>
           <p:cNvSpPr txBox="1"/>
           <p:nvPr/>
         </p:nvSpPr>
@@ -3203,7 +2692,7 @@
       </p:sp>
       <p:sp>
         <p:nvSpPr>
-          <p:cNvPr id="1375049282" name="Shape 22"/>
+          <p:cNvPr id="340770250" name="Shape 22"/>
           <p:cNvSpPr/>
           <p:nvPr/>
         </p:nvSpPr>
@@ -3230,7 +2719,7 @@
       </p:sp>
       <p:sp>
         <p:nvSpPr>
-          <p:cNvPr id="1830512933" name="Text 23"/>
+          <p:cNvPr id="1144132402" name="Text 23"/>
           <p:cNvSpPr txBox="1"/>
           <p:nvPr/>
         </p:nvSpPr>
@@ -3270,7 +2759,7 @@
       </p:sp>
       <p:sp>
         <p:nvSpPr>
-          <p:cNvPr id="365385432" name="Text 24"/>
+          <p:cNvPr id="1425618913" name="Text 24"/>
           <p:cNvSpPr txBox="1"/>
           <p:nvPr/>
         </p:nvSpPr>
@@ -3310,7 +2799,7 @@
       </p:sp>
       <p:sp>
         <p:nvSpPr>
-          <p:cNvPr id="1885090321" name="Text 25"/>
+          <p:cNvPr id="1629209593" name="Text 25"/>
           <p:cNvSpPr txBox="1"/>
           <p:nvPr/>
         </p:nvSpPr>
@@ -3350,7 +2839,7 @@
       </p:sp>
       <p:graphicFrame>
         <p:nvGraphicFramePr>
-          <p:cNvPr id="169838884" name="Table 0"/>
+          <p:cNvPr id="1586334327" name="Table 0"/>
           <p:cNvGraphicFramePr>
             <a:graphicFrameLocks xmlns:a="http://schemas.openxmlformats.org/drawingml/2006/main" noGrp="1"/>
           </p:cNvGraphicFramePr>
@@ -4129,7 +3618,7 @@
       </p:graphicFrame>
       <p:sp>
         <p:nvSpPr>
-          <p:cNvPr id="1258984270" name="Shape 26"/>
+          <p:cNvPr id="131517669" name="Shape 26"/>
           <p:cNvSpPr/>
           <p:nvPr/>
         </p:nvSpPr>
@@ -4156,7 +3645,7 @@
       </p:sp>
       <p:sp>
         <p:nvSpPr>
-          <p:cNvPr id="638322150" name="Text 27"/>
+          <p:cNvPr id="749405881" name="Text 27"/>
           <p:cNvSpPr txBox="1"/>
           <p:nvPr/>
         </p:nvSpPr>
@@ -4196,7 +3685,7 @@
       </p:sp>
       <p:sp>
         <p:nvSpPr>
-          <p:cNvPr id="117361035" name="Text 28"/>
+          <p:cNvPr id="2115903276" name="Text 28"/>
           <p:cNvSpPr txBox="1"/>
           <p:nvPr/>
         </p:nvSpPr>
@@ -4344,7 +3833,7 @@
       </p:sp>
       <p:sp>
         <p:nvSpPr>
-          <p:cNvPr id="1164091870" name="Text 29"/>
+          <p:cNvPr id="1090476854" name="Text 29"/>
           <p:cNvSpPr txBox="1"/>
           <p:nvPr/>
         </p:nvSpPr>
@@ -4384,7 +3873,7 @@
       </p:sp>
       <p:sp>
         <p:nvSpPr>
-          <p:cNvPr id="482953696" name="Text 30"/>
+          <p:cNvPr id="966545579" name="Text 30"/>
           <p:cNvSpPr txBox="1"/>
           <p:nvPr/>
         </p:nvSpPr>
@@ -4464,7 +3953,7 @@
       </p:grpSpPr>
       <p:sp>
         <p:nvSpPr>
-          <p:cNvPr id="1986388656" name="Text 0"/>
+          <p:cNvPr id="103376957" name="Text 0"/>
           <p:cNvSpPr txBox="1"/>
           <p:nvPr/>
         </p:nvSpPr>
@@ -4504,7 +3993,7 @@
       </p:sp>
       <p:sp>
         <p:nvSpPr>
-          <p:cNvPr id="831571985" name="Text 1"/>
+          <p:cNvPr id="808438127" name="Text 1"/>
           <p:cNvSpPr txBox="1"/>
           <p:nvPr/>
         </p:nvSpPr>
@@ -4544,7 +4033,7 @@
       </p:sp>
       <p:sp>
         <p:nvSpPr>
-          <p:cNvPr id="2139870331" name="Shape 2"/>
+          <p:cNvPr id="157906568" name="Shape 2"/>
           <p:cNvSpPr/>
           <p:nvPr/>
         </p:nvSpPr>
@@ -4569,7 +4058,7 @@
       </p:sp>
       <p:pic>
         <p:nvPicPr>
-          <p:cNvPr id="272687475" name="Image 0" descr="preencoded.png"/>
+          <p:cNvPr id="1507930780" name="Image 0" descr="preencoded.png"/>
           <p:cNvPicPr>
             <a:picLocks noChangeAspect="1"/>
           </p:cNvPicPr>
@@ -4591,7 +4080,7 @@
       </p:pic>
       <p:sp>
         <p:nvSpPr>
-          <p:cNvPr id="524832481" name="Text 3"/>
+          <p:cNvPr id="1497716864" name="Text 3"/>
           <p:cNvSpPr txBox="1"/>
           <p:nvPr/>
         </p:nvSpPr>
@@ -4631,7 +4120,7 @@
       </p:sp>
       <p:sp>
         <p:nvSpPr>
-          <p:cNvPr id="1923944935" name="Text 4"/>
+          <p:cNvPr id="368252031" name="Text 4"/>
           <p:cNvSpPr txBox="1"/>
           <p:nvPr/>
         </p:nvSpPr>
@@ -4671,7 +4160,7 @@
       </p:sp>
       <p:sp>
         <p:nvSpPr>
-          <p:cNvPr id="1087366511" name="Shape 5"/>
+          <p:cNvPr id="2140922436" name="Shape 5"/>
           <p:cNvSpPr/>
           <p:nvPr/>
         </p:nvSpPr>
@@ -4696,7 +4185,7 @@
       </p:sp>
       <p:pic>
         <p:nvPicPr>
-          <p:cNvPr id="970066294" name="Image 1" descr="preencoded.png"/>
+          <p:cNvPr id="646526080" name="Image 1" descr="preencoded.png"/>
           <p:cNvPicPr>
             <a:picLocks noChangeAspect="1"/>
           </p:cNvPicPr>
@@ -4718,7 +4207,7 @@
       </p:pic>
       <p:sp>
         <p:nvSpPr>
-          <p:cNvPr id="314862922" name="Text 6"/>
+          <p:cNvPr id="1542905430" name="Text 6"/>
           <p:cNvSpPr txBox="1"/>
           <p:nvPr/>
         </p:nvSpPr>
@@ -4758,7 +4247,7 @@
       </p:sp>
       <p:sp>
         <p:nvSpPr>
-          <p:cNvPr id="1234671925" name="Text 7"/>
+          <p:cNvPr id="1221629825" name="Text 7"/>
           <p:cNvSpPr txBox="1"/>
           <p:nvPr/>
         </p:nvSpPr>
@@ -4798,7 +4287,7 @@
       </p:sp>
       <p:sp>
         <p:nvSpPr>
-          <p:cNvPr id="448291924" name="Shape 8"/>
+          <p:cNvPr id="1982390663" name="Shape 8"/>
           <p:cNvSpPr/>
           <p:nvPr/>
         </p:nvSpPr>
@@ -4823,7 +4312,7 @@
       </p:sp>
       <p:pic>
         <p:nvPicPr>
-          <p:cNvPr id="1740951109" name="Image 2" descr="preencoded.png"/>
+          <p:cNvPr id="1295638587" name="Image 2" descr="preencoded.png"/>
           <p:cNvPicPr>
             <a:picLocks noChangeAspect="1"/>
           </p:cNvPicPr>
@@ -4845,7 +4334,7 @@
       </p:pic>
       <p:sp>
         <p:nvSpPr>
-          <p:cNvPr id="881707901" name="Text 9"/>
+          <p:cNvPr id="1347153820" name="Text 9"/>
           <p:cNvSpPr txBox="1"/>
           <p:nvPr/>
         </p:nvSpPr>
@@ -4885,7 +4374,7 @@
       </p:sp>
       <p:sp>
         <p:nvSpPr>
-          <p:cNvPr id="483813161" name="Text 10"/>
+          <p:cNvPr id="1815680847" name="Text 10"/>
           <p:cNvSpPr txBox="1"/>
           <p:nvPr/>
         </p:nvSpPr>
@@ -4925,7 +4414,7 @@
       </p:sp>
       <p:sp>
         <p:nvSpPr>
-          <p:cNvPr id="2049132046" name="Shape 11"/>
+          <p:cNvPr id="181084258" name="Shape 11"/>
           <p:cNvSpPr/>
           <p:nvPr/>
         </p:nvSpPr>
@@ -4950,7 +4439,7 @@
       </p:sp>
       <p:pic>
         <p:nvPicPr>
-          <p:cNvPr id="1142760588" name="Image 3" descr="preencoded.png"/>
+          <p:cNvPr id="249071080" name="Image 3" descr="preencoded.png"/>
           <p:cNvPicPr>
             <a:picLocks noChangeAspect="1"/>
           </p:cNvPicPr>
@@ -4972,7 +4461,7 @@
       </p:pic>
       <p:sp>
         <p:nvSpPr>
-          <p:cNvPr id="636415382" name="Text 12"/>
+          <p:cNvPr id="670300007" name="Text 12"/>
           <p:cNvSpPr txBox="1"/>
           <p:nvPr/>
         </p:nvSpPr>
@@ -5012,7 +4501,7 @@
       </p:sp>
       <p:sp>
         <p:nvSpPr>
-          <p:cNvPr id="902721473" name="Text 13"/>
+          <p:cNvPr id="52064500" name="Text 13"/>
           <p:cNvSpPr txBox="1"/>
           <p:nvPr/>
         </p:nvSpPr>
@@ -5052,7 +4541,7 @@
       </p:sp>
       <p:sp>
         <p:nvSpPr>
-          <p:cNvPr id="1210430968" name="Shape 14"/>
+          <p:cNvPr id="1033556255" name="Shape 14"/>
           <p:cNvSpPr/>
           <p:nvPr/>
         </p:nvSpPr>
@@ -5077,7 +4566,7 @@
       </p:sp>
       <p:pic>
         <p:nvPicPr>
-          <p:cNvPr id="1372395410" name="Image 4" descr="preencoded.png"/>
+          <p:cNvPr id="774232567" name="Image 4" descr="preencoded.png"/>
           <p:cNvPicPr>
             <a:picLocks noChangeAspect="1"/>
           </p:cNvPicPr>
@@ -5099,7 +4588,7 @@
       </p:pic>
       <p:sp>
         <p:nvSpPr>
-          <p:cNvPr id="111494258" name="Text 15"/>
+          <p:cNvPr id="835644919" name="Text 15"/>
           <p:cNvSpPr txBox="1"/>
           <p:nvPr/>
         </p:nvSpPr>
@@ -5139,7 +4628,7 @@
       </p:sp>
       <p:sp>
         <p:nvSpPr>
-          <p:cNvPr id="961093336" name="Text 16"/>
+          <p:cNvPr id="2120240479" name="Text 16"/>
           <p:cNvSpPr txBox="1"/>
           <p:nvPr/>
         </p:nvSpPr>
@@ -5179,7 +4668,7 @@
       </p:sp>
       <p:sp>
         <p:nvSpPr>
-          <p:cNvPr id="62613233" name="Text 17"/>
+          <p:cNvPr id="433337546" name="Text 17"/>
           <p:cNvSpPr txBox="1"/>
           <p:nvPr/>
         </p:nvSpPr>
@@ -5219,7 +4708,7 @@
       </p:sp>
       <p:graphicFrame>
         <p:nvGraphicFramePr>
-          <p:cNvPr id="1835475749" name="Table 0"/>
+          <p:cNvPr id="924103737" name="Table 0"/>
           <p:cNvGraphicFramePr>
             <a:graphicFrameLocks xmlns:a="http://schemas.openxmlformats.org/drawingml/2006/main" noGrp="1"/>
           </p:cNvGraphicFramePr>
@@ -6818,7 +6307,7 @@
       </p:graphicFrame>
       <p:sp>
         <p:nvSpPr>
-          <p:cNvPr id="1353965825" name="Text 18"/>
+          <p:cNvPr id="1258006169" name="Text 18"/>
           <p:cNvSpPr txBox="1"/>
           <p:nvPr/>
         </p:nvSpPr>
@@ -6858,7 +6347,7 @@
       </p:sp>
       <p:sp>
         <p:nvSpPr>
-          <p:cNvPr id="795398209" name="Text 19"/>
+          <p:cNvPr id="247729972" name="Text 19"/>
           <p:cNvSpPr txBox="1"/>
           <p:nvPr/>
         </p:nvSpPr>
@@ -6938,7 +6427,7 @@
       </p:grpSpPr>
       <p:sp>
         <p:nvSpPr>
-          <p:cNvPr id="1252349467" name="Text 0"/>
+          <p:cNvPr id="1795681773" name="Text 0"/>
           <p:cNvSpPr txBox="1"/>
           <p:nvPr/>
         </p:nvSpPr>
@@ -6978,7 +6467,7 @@
       </p:sp>
       <p:sp>
         <p:nvSpPr>
-          <p:cNvPr id="1993164327" name="Text 1"/>
+          <p:cNvPr id="1403169395" name="Text 1"/>
           <p:cNvSpPr txBox="1"/>
           <p:nvPr/>
         </p:nvSpPr>
@@ -7018,7 +6507,7 @@
       </p:sp>
       <p:sp>
         <p:nvSpPr>
-          <p:cNvPr id="308714356" name="Text 2"/>
+          <p:cNvPr id="567558680" name="Text 2"/>
           <p:cNvSpPr txBox="1"/>
           <p:nvPr/>
         </p:nvSpPr>
@@ -7058,7 +6547,7 @@
       </p:sp>
       <p:sp>
         <p:nvSpPr>
-          <p:cNvPr id="1429553274" name="Shape 3"/>
+          <p:cNvPr id="1458433817" name="Shape 3"/>
           <p:cNvSpPr/>
           <p:nvPr/>
         </p:nvSpPr>
@@ -7085,7 +6574,7 @@
       </p:sp>
       <p:sp>
         <p:nvSpPr>
-          <p:cNvPr id="2091226371" name="Text 4"/>
+          <p:cNvPr id="1811036587" name="Text 4"/>
           <p:cNvSpPr txBox="1"/>
           <p:nvPr/>
         </p:nvSpPr>
@@ -7125,7 +6614,7 @@
       </p:sp>
       <p:sp>
         <p:nvSpPr>
-          <p:cNvPr id="1164303457" name="Text 5"/>
+          <p:cNvPr id="853426261" name="Text 5"/>
           <p:cNvSpPr txBox="1"/>
           <p:nvPr/>
         </p:nvSpPr>
@@ -7165,7 +6654,7 @@
       </p:sp>
       <p:sp>
         <p:nvSpPr>
-          <p:cNvPr id="1109286519" name="Shape 6"/>
+          <p:cNvPr id="1388737173" name="Shape 6"/>
           <p:cNvSpPr/>
           <p:nvPr/>
         </p:nvSpPr>
@@ -7192,7 +6681,7 @@
       </p:sp>
       <p:sp>
         <p:nvSpPr>
-          <p:cNvPr id="500703507" name="Text 7"/>
+          <p:cNvPr id="1464260514" name="Text 7"/>
           <p:cNvSpPr txBox="1"/>
           <p:nvPr/>
         </p:nvSpPr>
@@ -7232,7 +6721,7 @@
       </p:sp>
       <p:sp>
         <p:nvSpPr>
-          <p:cNvPr id="1952746368" name="Text 8"/>
+          <p:cNvPr id="1501772125" name="Text 8"/>
           <p:cNvSpPr txBox="1"/>
           <p:nvPr/>
         </p:nvSpPr>
@@ -7272,7 +6761,7 @@
       </p:sp>
       <p:sp>
         <p:nvSpPr>
-          <p:cNvPr id="471386141" name="Shape 9"/>
+          <p:cNvPr id="1461487928" name="Shape 9"/>
           <p:cNvSpPr/>
           <p:nvPr/>
         </p:nvSpPr>
@@ -7299,7 +6788,7 @@
       </p:sp>
       <p:sp>
         <p:nvSpPr>
-          <p:cNvPr id="1799547082" name="Text 10"/>
+          <p:cNvPr id="1321026304" name="Text 10"/>
           <p:cNvSpPr txBox="1"/>
           <p:nvPr/>
         </p:nvSpPr>
@@ -7339,7 +6828,7 @@
       </p:sp>
       <p:sp>
         <p:nvSpPr>
-          <p:cNvPr id="2088679665" name="Text 11"/>
+          <p:cNvPr id="1123837182" name="Text 11"/>
           <p:cNvSpPr txBox="1"/>
           <p:nvPr/>
         </p:nvSpPr>
@@ -7379,7 +6868,7 @@
       </p:sp>
       <p:sp>
         <p:nvSpPr>
-          <p:cNvPr id="714550752" name="Shape 12"/>
+          <p:cNvPr id="1875115261" name="Shape 12"/>
           <p:cNvSpPr/>
           <p:nvPr/>
         </p:nvSpPr>
@@ -7406,7 +6895,7 @@
       </p:sp>
       <p:sp>
         <p:nvSpPr>
-          <p:cNvPr id="1109290980" name="Text 13"/>
+          <p:cNvPr id="1507998635" name="Text 13"/>
           <p:cNvSpPr txBox="1"/>
           <p:nvPr/>
         </p:nvSpPr>
@@ -7446,7 +6935,7 @@
       </p:sp>
       <p:sp>
         <p:nvSpPr>
-          <p:cNvPr id="589878048" name="Text 14"/>
+          <p:cNvPr id="1682049159" name="Text 14"/>
           <p:cNvSpPr txBox="1"/>
           <p:nvPr/>
         </p:nvSpPr>
@@ -7486,7 +6975,7 @@
       </p:sp>
       <p:sp>
         <p:nvSpPr>
-          <p:cNvPr id="1297407251" name="Shape 15"/>
+          <p:cNvPr id="1083410813" name="Shape 15"/>
           <p:cNvSpPr/>
           <p:nvPr/>
         </p:nvSpPr>
@@ -7513,7 +7002,7 @@
       </p:sp>
       <p:sp>
         <p:nvSpPr>
-          <p:cNvPr id="510453432" name="Text 16"/>
+          <p:cNvPr id="796891884" name="Text 16"/>
           <p:cNvSpPr txBox="1"/>
           <p:nvPr/>
         </p:nvSpPr>
@@ -7553,7 +7042,7 @@
       </p:sp>
       <p:sp>
         <p:nvSpPr>
-          <p:cNvPr id="563291048" name="Text 17"/>
+          <p:cNvPr id="1648712834" name="Text 17"/>
           <p:cNvSpPr txBox="1"/>
           <p:nvPr/>
         </p:nvSpPr>
@@ -7593,7 +7082,7 @@
       </p:sp>
       <p:sp>
         <p:nvSpPr>
-          <p:cNvPr id="932310553" name="Shape 18"/>
+          <p:cNvPr id="1334455198" name="Shape 18"/>
           <p:cNvSpPr/>
           <p:nvPr/>
         </p:nvSpPr>
@@ -7620,7 +7109,7 @@
       </p:sp>
       <p:sp>
         <p:nvSpPr>
-          <p:cNvPr id="362221696" name="Text 19"/>
+          <p:cNvPr id="978841625" name="Text 19"/>
           <p:cNvSpPr txBox="1"/>
           <p:nvPr/>
         </p:nvSpPr>
@@ -7660,7 +7149,7 @@
       </p:sp>
       <p:sp>
         <p:nvSpPr>
-          <p:cNvPr id="597861025" name="Text 20"/>
+          <p:cNvPr id="741212177" name="Text 20"/>
           <p:cNvSpPr txBox="1"/>
           <p:nvPr/>
         </p:nvSpPr>
@@ -7700,7 +7189,7 @@
       </p:sp>
       <p:sp>
         <p:nvSpPr>
-          <p:cNvPr id="2079724058" name="Shape 21"/>
+          <p:cNvPr id="1044333919" name="Shape 21"/>
           <p:cNvSpPr/>
           <p:nvPr/>
         </p:nvSpPr>
@@ -7727,7 +7216,7 @@
       </p:sp>
       <p:sp>
         <p:nvSpPr>
-          <p:cNvPr id="1856606074" name="Text 22"/>
+          <p:cNvPr id="49107802" name="Text 22"/>
           <p:cNvSpPr txBox="1"/>
           <p:nvPr/>
         </p:nvSpPr>
@@ -7767,7 +7256,7 @@
       </p:sp>
       <p:sp>
         <p:nvSpPr>
-          <p:cNvPr id="378383754" name="Text 23"/>
+          <p:cNvPr id="708081700" name="Text 23"/>
           <p:cNvSpPr txBox="1"/>
           <p:nvPr/>
         </p:nvSpPr>
@@ -7807,7 +7296,7 @@
       </p:sp>
       <p:sp>
         <p:nvSpPr>
-          <p:cNvPr id="425702948" name="Shape 24"/>
+          <p:cNvPr id="754459417" name="Shape 24"/>
           <p:cNvSpPr/>
           <p:nvPr/>
         </p:nvSpPr>
@@ -7834,7 +7323,7 @@
       </p:sp>
       <p:sp>
         <p:nvSpPr>
-          <p:cNvPr id="1861478827" name="Text 25"/>
+          <p:cNvPr id="2001423316" name="Text 25"/>
           <p:cNvSpPr txBox="1"/>
           <p:nvPr/>
         </p:nvSpPr>
@@ -7874,7 +7363,7 @@
       </p:sp>
       <p:sp>
         <p:nvSpPr>
-          <p:cNvPr id="695062512" name="Text 26"/>
+          <p:cNvPr id="1071738274" name="Text 26"/>
           <p:cNvSpPr txBox="1"/>
           <p:nvPr/>
         </p:nvSpPr>
@@ -7914,7 +7403,7 @@
       </p:sp>
       <p:sp>
         <p:nvSpPr>
-          <p:cNvPr id="606239235" name="Text 27"/>
+          <p:cNvPr id="23478059" name="Text 27"/>
           <p:cNvSpPr txBox="1"/>
           <p:nvPr/>
         </p:nvSpPr>
@@ -7954,7 +7443,7 @@
       </p:sp>
       <p:sp>
         <p:nvSpPr>
-          <p:cNvPr id="432982561" name="Shape 28"/>
+          <p:cNvPr id="1388027645" name="Shape 28"/>
           <p:cNvSpPr/>
           <p:nvPr/>
         </p:nvSpPr>
@@ -7979,7 +7468,7 @@
       </p:sp>
       <p:pic>
         <p:nvPicPr>
-          <p:cNvPr id="1366935305" name="Image 0" descr="preencoded.png"/>
+          <p:cNvPr id="1751840966" name="Image 0" descr="preencoded.png"/>
           <p:cNvPicPr>
             <a:picLocks noChangeAspect="1"/>
           </p:cNvPicPr>
@@ -8001,7 +7490,7 @@
       </p:pic>
       <p:sp>
         <p:nvSpPr>
-          <p:cNvPr id="2060723379" name="Text 29"/>
+          <p:cNvPr id="340364239" name="Text 29"/>
           <p:cNvSpPr txBox="1"/>
           <p:nvPr/>
         </p:nvSpPr>
@@ -8041,7 +7530,7 @@
       </p:sp>
       <p:sp>
         <p:nvSpPr>
-          <p:cNvPr id="1310087029" name="Text 30"/>
+          <p:cNvPr id="1826021370" name="Text 30"/>
           <p:cNvSpPr txBox="1"/>
           <p:nvPr/>
         </p:nvSpPr>
@@ -8081,7 +7570,7 @@
       </p:sp>
       <p:sp>
         <p:nvSpPr>
-          <p:cNvPr id="33351814" name="Shape 31"/>
+          <p:cNvPr id="212145115" name="Shape 31"/>
           <p:cNvSpPr/>
           <p:nvPr/>
         </p:nvSpPr>
@@ -8106,7 +7595,7 @@
       </p:sp>
       <p:pic>
         <p:nvPicPr>
-          <p:cNvPr id="1698439561" name="Image 1" descr="preencoded.png"/>
+          <p:cNvPr id="703078107" name="Image 1" descr="preencoded.png"/>
           <p:cNvPicPr>
             <a:picLocks noChangeAspect="1"/>
           </p:cNvPicPr>
@@ -8128,7 +7617,7 @@
       </p:pic>
       <p:sp>
         <p:nvSpPr>
-          <p:cNvPr id="189477737" name="Text 32"/>
+          <p:cNvPr id="232152221" name="Text 32"/>
           <p:cNvSpPr txBox="1"/>
           <p:nvPr/>
         </p:nvSpPr>
@@ -8168,7 +7657,7 @@
       </p:sp>
       <p:sp>
         <p:nvSpPr>
-          <p:cNvPr id="1355600488" name="Text 33"/>
+          <p:cNvPr id="2014985796" name="Text 33"/>
           <p:cNvSpPr txBox="1"/>
           <p:nvPr/>
         </p:nvSpPr>
@@ -8208,7 +7697,7 @@
       </p:sp>
       <p:sp>
         <p:nvSpPr>
-          <p:cNvPr id="1698925201" name="Shape 34"/>
+          <p:cNvPr id="998573916" name="Shape 34"/>
           <p:cNvSpPr/>
           <p:nvPr/>
         </p:nvSpPr>
@@ -8233,7 +7722,7 @@
       </p:sp>
       <p:pic>
         <p:nvPicPr>
-          <p:cNvPr id="633178486" name="Image 2" descr="preencoded.png"/>
+          <p:cNvPr id="626727292" name="Image 2" descr="preencoded.png"/>
           <p:cNvPicPr>
             <a:picLocks noChangeAspect="1"/>
           </p:cNvPicPr>
@@ -8255,7 +7744,7 @@
       </p:pic>
       <p:sp>
         <p:nvSpPr>
-          <p:cNvPr id="607386580" name="Text 35"/>
+          <p:cNvPr id="1579466541" name="Text 35"/>
           <p:cNvSpPr txBox="1"/>
           <p:nvPr/>
         </p:nvSpPr>
@@ -8295,7 +7784,7 @@
       </p:sp>
       <p:sp>
         <p:nvSpPr>
-          <p:cNvPr id="91183802" name="Text 36"/>
+          <p:cNvPr id="329122951" name="Text 36"/>
           <p:cNvSpPr txBox="1"/>
           <p:nvPr/>
         </p:nvSpPr>
@@ -8335,7 +7824,7 @@
       </p:sp>
       <p:sp>
         <p:nvSpPr>
-          <p:cNvPr id="98345897" name="Shape 37"/>
+          <p:cNvPr id="746089085" name="Shape 37"/>
           <p:cNvSpPr/>
           <p:nvPr/>
         </p:nvSpPr>
@@ -8360,7 +7849,7 @@
       </p:sp>
       <p:pic>
         <p:nvPicPr>
-          <p:cNvPr id="244372899" name="Image 3" descr="preencoded.png"/>
+          <p:cNvPr id="1477087413" name="Image 3" descr="preencoded.png"/>
           <p:cNvPicPr>
             <a:picLocks noChangeAspect="1"/>
           </p:cNvPicPr>
@@ -8382,7 +7871,7 @@
       </p:pic>
       <p:sp>
         <p:nvSpPr>
-          <p:cNvPr id="1894065505" name="Text 38"/>
+          <p:cNvPr id="734038283" name="Text 38"/>
           <p:cNvSpPr txBox="1"/>
           <p:nvPr/>
         </p:nvSpPr>
@@ -8422,7 +7911,7 @@
       </p:sp>
       <p:sp>
         <p:nvSpPr>
-          <p:cNvPr id="736097178" name="Text 39"/>
+          <p:cNvPr id="1953692948" name="Text 39"/>
           <p:cNvSpPr txBox="1"/>
           <p:nvPr/>
         </p:nvSpPr>
@@ -8462,7 +7951,7 @@
       </p:sp>
       <p:sp>
         <p:nvSpPr>
-          <p:cNvPr id="64960671" name="Shape 40"/>
+          <p:cNvPr id="623476618" name="Shape 40"/>
           <p:cNvSpPr/>
           <p:nvPr/>
         </p:nvSpPr>
@@ -8487,7 +7976,7 @@
       </p:sp>
       <p:pic>
         <p:nvPicPr>
-          <p:cNvPr id="1924914032" name="Image 4" descr="preencoded.png"/>
+          <p:cNvPr id="1220659071" name="Image 4" descr="preencoded.png"/>
           <p:cNvPicPr>
             <a:picLocks noChangeAspect="1"/>
           </p:cNvPicPr>
@@ -8509,7 +7998,7 @@
       </p:pic>
       <p:sp>
         <p:nvSpPr>
-          <p:cNvPr id="552822624" name="Text 41"/>
+          <p:cNvPr id="572323738" name="Text 41"/>
           <p:cNvSpPr txBox="1"/>
           <p:nvPr/>
         </p:nvSpPr>
@@ -8549,7 +8038,7 @@
       </p:sp>
       <p:sp>
         <p:nvSpPr>
-          <p:cNvPr id="324680945" name="Text 42"/>
+          <p:cNvPr id="261768254" name="Text 42"/>
           <p:cNvSpPr txBox="1"/>
           <p:nvPr/>
         </p:nvSpPr>
@@ -8589,7 +8078,7 @@
       </p:sp>
       <p:sp>
         <p:nvSpPr>
-          <p:cNvPr id="1747611117" name="Text 43"/>
+          <p:cNvPr id="654786918" name="Text 43"/>
           <p:cNvSpPr txBox="1"/>
           <p:nvPr/>
         </p:nvSpPr>
@@ -8644,744 +8133,6 @@
 </file>
 
 <file path=ppt/slides/slide5.xml><?xml version="1.0" encoding="utf-8"?>
-<p:sld xmlns:a="http://schemas.openxmlformats.org/drawingml/2006/main" xmlns:r="http://schemas.openxmlformats.org/officeDocument/2006/relationships" xmlns:p="http://schemas.openxmlformats.org/presentationml/2006/main" xmlns:m="http://schemas.openxmlformats.org/officeDocument/2006/math" xmlns:w="http://schemas.openxmlformats.org/wordprocessingml/2006/main" xmlns:mc="http://schemas.openxmlformats.org/markup-compatibility/2006" showMasterPhAnim="0" showMasterSp="1" show="1">
-  <p:cSld name="Slide 5">
-    <p:bg>
-      <p:bgPr shadeToTitle="0">
-        <a:solidFill>
-          <a:srgbClr val="FFFFFF"/>
-        </a:solidFill>
-      </p:bgPr>
-    </p:bg>
-    <p:spTree>
-      <p:nvGrpSpPr>
-        <p:cNvPr id="1" name=""/>
-        <p:cNvGrpSpPr/>
-        <p:nvPr/>
-      </p:nvGrpSpPr>
-      <p:grpSpPr bwMode="auto">
-        <a:xfrm>
-          <a:off x="0" y="0"/>
-          <a:ext cx="0" cy="0"/>
-          <a:chOff x="0" y="0"/>
-          <a:chExt cx="0" cy="0"/>
-        </a:xfrm>
-      </p:grpSpPr>
-      <p:sp>
-        <p:nvSpPr>
-          <p:cNvPr id="1501840569" name="Text 0"/>
-          <p:cNvSpPr txBox="1"/>
-          <p:nvPr/>
-        </p:nvSpPr>
-        <p:spPr bwMode="auto">
-          <a:xfrm>
-            <a:off x="548640" y="365760"/>
-            <a:ext cx="8229600" cy="274320"/>
-          </a:xfrm>
-          <a:prstGeom prst="rect">
-            <a:avLst/>
-          </a:prstGeom>
-          <a:noFill/>
-          <a:ln/>
-        </p:spPr>
-        <p:txBody>
-          <a:bodyPr wrap="square" lIns="0" tIns="0" rIns="0" bIns="0" rtlCol="0" anchor="ctr"/>
-          <a:lstStyle/>
-          <a:p>
-            <a:pPr marL="0" indent="0">
-              <a:buNone/>
-              <a:defRPr/>
-            </a:pPr>
-            <a:r>
-              <a:rPr lang="en-US" sz="1200" b="1" spc="300">
-                <a:solidFill>
-                  <a:srgbClr val="12A58C"/>
-                </a:solidFill>
-                <a:latin typeface="Arial"/>
-                <a:ea typeface="Arial"/>
-                <a:cs typeface="Arial"/>
-              </a:rPr>
-              <a:t>CRITERION 3  ·  METHODOLOGY EVALUATION</a:t>
-            </a:r>
-            <a:endParaRPr lang="en-US" sz="1200"/>
-          </a:p>
-        </p:txBody>
-      </p:sp>
-      <p:sp>
-        <p:nvSpPr>
-          <p:cNvPr id="1530283519" name="Text 1"/>
-          <p:cNvSpPr txBox="1"/>
-          <p:nvPr/>
-        </p:nvSpPr>
-        <p:spPr bwMode="auto">
-          <a:xfrm>
-            <a:off x="548640" y="658368"/>
-            <a:ext cx="11064240" cy="685800"/>
-          </a:xfrm>
-          <a:prstGeom prst="rect">
-            <a:avLst/>
-          </a:prstGeom>
-          <a:noFill/>
-          <a:ln/>
-        </p:spPr>
-        <p:txBody>
-          <a:bodyPr wrap="square" lIns="0" tIns="0" rIns="0" bIns="0" rtlCol="0" anchor="ctr"/>
-          <a:lstStyle/>
-          <a:p>
-            <a:pPr marL="0" indent="0">
-              <a:buNone/>
-              <a:defRPr/>
-            </a:pPr>
-            <a:r>
-              <a:rPr lang="en-US" sz="3200" b="1">
-                <a:solidFill>
-                  <a:srgbClr val="0F1C2B"/>
-                </a:solidFill>
-                <a:latin typeface="Arial"/>
-                <a:ea typeface="Arial"/>
-                <a:cs typeface="Arial"/>
-              </a:rPr>
-              <a:t>Test results: storage and integrity</a:t>
-            </a:r>
-            <a:endParaRPr lang="en-US" sz="3200"/>
-          </a:p>
-        </p:txBody>
-      </p:sp>
-      <p:sp>
-        <p:nvSpPr>
-          <p:cNvPr id="1882028057" name="Shape 2"/>
-          <p:cNvSpPr/>
-          <p:nvPr/>
-        </p:nvSpPr>
-        <p:spPr bwMode="auto">
-          <a:xfrm>
-            <a:off x="548640" y="1554480"/>
-            <a:ext cx="3291840" cy="4526280"/>
-          </a:xfrm>
-          <a:prstGeom prst="roundRect">
-            <a:avLst>
-              <a:gd name="adj" fmla="val 3333"/>
-            </a:avLst>
-          </a:prstGeom>
-          <a:solidFill>
-            <a:srgbClr val="EEF4F3"/>
-          </a:solidFill>
-          <a:ln w="12700">
-            <a:solidFill>
-              <a:srgbClr val="EEF4F3"/>
-            </a:solidFill>
-            <a:prstDash val="solid"/>
-          </a:ln>
-        </p:spPr>
-      </p:sp>
-      <p:sp>
-        <p:nvSpPr>
-          <p:cNvPr id="265329803" name="Text 3"/>
-          <p:cNvSpPr txBox="1"/>
-          <p:nvPr/>
-        </p:nvSpPr>
-        <p:spPr bwMode="auto">
-          <a:xfrm>
-            <a:off x="777240" y="1691640"/>
-            <a:ext cx="2834640" cy="320040"/>
-          </a:xfrm>
-          <a:prstGeom prst="rect">
-            <a:avLst/>
-          </a:prstGeom>
-          <a:noFill/>
-          <a:ln/>
-        </p:spPr>
-        <p:txBody>
-          <a:bodyPr wrap="square" lIns="0" tIns="0" rIns="0" bIns="0" rtlCol="0" anchor="ctr"/>
-          <a:lstStyle/>
-          <a:p>
-            <a:pPr marL="0" indent="0">
-              <a:buNone/>
-              <a:defRPr/>
-            </a:pPr>
-            <a:r>
-              <a:rPr lang="en-US" sz="1500" b="1">
-                <a:solidFill>
-                  <a:srgbClr val="0F1C2B"/>
-                </a:solidFill>
-                <a:latin typeface="Arial"/>
-                <a:ea typeface="Arial"/>
-                <a:cs typeface="Arial"/>
-              </a:rPr>
-              <a:t>Test setup</a:t>
-            </a:r>
-            <a:endParaRPr lang="en-US" sz="1500"/>
-          </a:p>
-        </p:txBody>
-      </p:sp>
-      <p:sp>
-        <p:nvSpPr>
-          <p:cNvPr id="209889393" name="Text 4"/>
-          <p:cNvSpPr txBox="1"/>
-          <p:nvPr/>
-        </p:nvSpPr>
-        <p:spPr bwMode="auto">
-          <a:xfrm>
-            <a:off x="777240" y="2103120"/>
-            <a:ext cx="2926080" cy="3840480"/>
-          </a:xfrm>
-          <a:prstGeom prst="rect">
-            <a:avLst/>
-          </a:prstGeom>
-          <a:noFill/>
-          <a:ln/>
-        </p:spPr>
-        <p:txBody>
-          <a:bodyPr wrap="square" lIns="0" tIns="0" rIns="0" bIns="0" rtlCol="0" anchor="t"/>
-          <a:lstStyle/>
-          <a:p>
-            <a:pPr marL="342900" indent="-342900">
-              <a:spcAft>
-                <a:spcPts val="800"/>
-              </a:spcAft>
-              <a:buSzPct val="100000"/>
-              <a:buChar char="•"/>
-              <a:defRPr/>
-            </a:pPr>
-            <a:r>
-              <a:rPr lang="en-US" sz="1300">
-                <a:solidFill>
-                  <a:srgbClr val="1D2A36"/>
-                </a:solidFill>
-                <a:latin typeface="Calibri"/>
-                <a:ea typeface="Calibri"/>
-                <a:cs typeface="Calibri"/>
-              </a:rPr>
-              <a:t>Text set: 200 log files + source code, 51.7 MB</a:t>
-            </a:r>
-            <a:endParaRPr lang="en-US" sz="1300"/>
-          </a:p>
-          <a:p>
-            <a:pPr marL="342900" indent="-342900">
-              <a:spcAft>
-                <a:spcPts val="800"/>
-              </a:spcAft>
-              <a:buSzPct val="100000"/>
-              <a:buChar char="•"/>
-              <a:defRPr/>
-            </a:pPr>
-            <a:r>
-              <a:rPr lang="en-US" sz="1300">
-                <a:solidFill>
-                  <a:srgbClr val="1D2A36"/>
-                </a:solidFill>
-                <a:latin typeface="Calibri"/>
-                <a:ea typeface="Calibri"/>
-                <a:cs typeface="Calibri"/>
-              </a:rPr>
-              <a:t>Binary set: 50 MB of random bytes (incompressible)</a:t>
-            </a:r>
-            <a:endParaRPr lang="en-US" sz="1300"/>
-          </a:p>
-          <a:p>
-            <a:pPr marL="342900" indent="-342900">
-              <a:spcAft>
-                <a:spcPts val="800"/>
-              </a:spcAft>
-              <a:buSzPct val="100000"/>
-              <a:buChar char="•"/>
-              <a:defRPr/>
-            </a:pPr>
-            <a:r>
-              <a:rPr lang="en-US" sz="1300">
-                <a:solidFill>
-                  <a:srgbClr val="1D2A36"/>
-                </a:solidFill>
-                <a:latin typeface="Calibri"/>
-                <a:ea typeface="Calibri"/>
-                <a:cs typeface="Calibri"/>
-              </a:rPr>
-              <a:t>Each set backed up in all 4 modes, deleted, then restored from every snapshot</a:t>
-            </a:r>
-            <a:endParaRPr lang="en-US" sz="1300"/>
-          </a:p>
-          <a:p>
-            <a:pPr marL="342900" indent="-342900">
-              <a:spcAft>
-                <a:spcPts val="800"/>
-              </a:spcAft>
-              <a:buSzPct val="100000"/>
-              <a:buChar char="•"/>
-              <a:defRPr/>
-            </a:pPr>
-            <a:r>
-              <a:rPr lang="en-US" sz="1300">
-                <a:solidFill>
-                  <a:srgbClr val="1D2A36"/>
-                </a:solidFill>
-                <a:latin typeface="Calibri"/>
-                <a:ea typeface="Calibri"/>
-                <a:cs typeface="Calibri"/>
-              </a:rPr>
-              <a:t>Integrity checked by comparing SHA-1 of every file before and after</a:t>
-            </a:r>
-            <a:endParaRPr lang="en-US" sz="1300"/>
-          </a:p>
-          <a:p>
-            <a:pPr marL="342900" indent="-342900">
-              <a:spcAft>
-                <a:spcPts val="800"/>
-              </a:spcAft>
-              <a:buSzPct val="100000"/>
-              <a:buChar char="•"/>
-              <a:defRPr/>
-            </a:pPr>
-            <a:r>
-              <a:rPr lang="en-US" sz="1300">
-                <a:solidFill>
-                  <a:srgbClr val="1D2A36"/>
-                </a:solidFill>
-                <a:latin typeface="Calibri"/>
-                <a:ea typeface="Calibri"/>
-                <a:cs typeface="Calibri"/>
-              </a:rPr>
-              <a:t>Ubuntu 24.04, GCC -O2, lz4 and OpenSSL 3</a:t>
-            </a:r>
-            <a:endParaRPr lang="en-US" sz="1300"/>
-          </a:p>
-        </p:txBody>
-      </p:sp>
-      <p:graphicFrame>
-        <p:nvGraphicFramePr>
-          <p:cNvPr id="2043316627" name="Chart 0" descr=""/>
-          <p:cNvGraphicFramePr>
-            <a:graphicFrameLocks xmlns:a="http://schemas.openxmlformats.org/drawingml/2006/main"/>
-          </p:cNvGraphicFramePr>
-          <p:nvPr/>
-        </p:nvGraphicFramePr>
-        <p:xfrm rot="0">
-          <a:off x="4114800" y="1508759"/>
-          <a:ext cx="4663440" cy="4572000"/>
-        </p:xfrm>
-        <a:graphic>
-          <a:graphicData uri="http://schemas.openxmlformats.org/drawingml/2006/chart">
-            <c:chart xmlns:c="http://schemas.openxmlformats.org/drawingml/2006/chart" xmlns:r="http://schemas.openxmlformats.org/officeDocument/2006/relationships" r:id="rId3"/>
-          </a:graphicData>
-        </a:graphic>
-      </p:graphicFrame>
-      <p:sp>
-        <p:nvSpPr>
-          <p:cNvPr id="157627985" name="Shape 5"/>
-          <p:cNvSpPr/>
-          <p:nvPr/>
-        </p:nvSpPr>
-        <p:spPr bwMode="auto">
-          <a:xfrm>
-            <a:off x="9052560" y="1554480"/>
-            <a:ext cx="2606040" cy="1371600"/>
-          </a:xfrm>
-          <a:prstGeom prst="roundRect">
-            <a:avLst>
-              <a:gd name="adj" fmla="val 8000"/>
-            </a:avLst>
-          </a:prstGeom>
-          <a:solidFill>
-            <a:srgbClr val="EEF4F3"/>
-          </a:solidFill>
-          <a:ln w="12700">
-            <a:solidFill>
-              <a:srgbClr val="EEF4F3"/>
-            </a:solidFill>
-            <a:prstDash val="solid"/>
-          </a:ln>
-        </p:spPr>
-      </p:sp>
-      <p:sp>
-        <p:nvSpPr>
-          <p:cNvPr id="1744557774" name="Text 6"/>
-          <p:cNvSpPr txBox="1"/>
-          <p:nvPr/>
-        </p:nvSpPr>
-        <p:spPr bwMode="auto">
-          <a:xfrm>
-            <a:off x="9235440" y="1664208"/>
-            <a:ext cx="2286000" cy="685800"/>
-          </a:xfrm>
-          <a:prstGeom prst="rect">
-            <a:avLst/>
-          </a:prstGeom>
-          <a:noFill/>
-          <a:ln/>
-        </p:spPr>
-        <p:txBody>
-          <a:bodyPr wrap="square" lIns="0" tIns="0" rIns="0" bIns="0" rtlCol="0" anchor="ctr"/>
-          <a:lstStyle/>
-          <a:p>
-            <a:pPr marL="0" indent="0">
-              <a:buNone/>
-              <a:defRPr/>
-            </a:pPr>
-            <a:r>
-              <a:rPr lang="en-US" sz="3600" b="1">
-                <a:solidFill>
-                  <a:srgbClr val="12A58C"/>
-                </a:solidFill>
-                <a:latin typeface="Arial"/>
-                <a:ea typeface="Arial"/>
-                <a:cs typeface="Arial"/>
-              </a:rPr>
-              <a:t>57%</a:t>
-            </a:r>
-            <a:endParaRPr lang="en-US" sz="3600"/>
-          </a:p>
-        </p:txBody>
-      </p:sp>
-      <p:sp>
-        <p:nvSpPr>
-          <p:cNvPr id="1924520070" name="Text 7"/>
-          <p:cNvSpPr txBox="1"/>
-          <p:nvPr/>
-        </p:nvSpPr>
-        <p:spPr bwMode="auto">
-          <a:xfrm>
-            <a:off x="9235440" y="2359152"/>
-            <a:ext cx="2286000" cy="457200"/>
-          </a:xfrm>
-          <a:prstGeom prst="rect">
-            <a:avLst/>
-          </a:prstGeom>
-          <a:noFill/>
-          <a:ln/>
-        </p:spPr>
-        <p:txBody>
-          <a:bodyPr wrap="square" lIns="0" tIns="0" rIns="0" bIns="0" rtlCol="0" anchor="t"/>
-          <a:lstStyle/>
-          <a:p>
-            <a:pPr marL="0" indent="0">
-              <a:buNone/>
-              <a:defRPr/>
-            </a:pPr>
-            <a:r>
-              <a:rPr lang="en-US" sz="1200">
-                <a:solidFill>
-                  <a:srgbClr val="1D2A36"/>
-                </a:solidFill>
-                <a:latin typeface="Calibri"/>
-                <a:ea typeface="Calibri"/>
-                <a:cs typeface="Calibri"/>
-              </a:rPr>
-              <a:t>smaller backup for text data with lz4</a:t>
-            </a:r>
-            <a:endParaRPr lang="en-US" sz="1200"/>
-          </a:p>
-        </p:txBody>
-      </p:sp>
-      <p:sp>
-        <p:nvSpPr>
-          <p:cNvPr id="306631709" name="Shape 8"/>
-          <p:cNvSpPr/>
-          <p:nvPr/>
-        </p:nvSpPr>
-        <p:spPr bwMode="auto">
-          <a:xfrm>
-            <a:off x="9052560" y="3090672"/>
-            <a:ext cx="2606040" cy="1371600"/>
-          </a:xfrm>
-          <a:prstGeom prst="roundRect">
-            <a:avLst>
-              <a:gd name="adj" fmla="val 8000"/>
-            </a:avLst>
-          </a:prstGeom>
-          <a:solidFill>
-            <a:srgbClr val="E0F3EF"/>
-          </a:solidFill>
-          <a:ln w="12700">
-            <a:solidFill>
-              <a:srgbClr val="E0F3EF"/>
-            </a:solidFill>
-            <a:prstDash val="solid"/>
-          </a:ln>
-        </p:spPr>
-      </p:sp>
-      <p:sp>
-        <p:nvSpPr>
-          <p:cNvPr id="1382100455" name="Text 9"/>
-          <p:cNvSpPr txBox="1"/>
-          <p:nvPr/>
-        </p:nvSpPr>
-        <p:spPr bwMode="auto">
-          <a:xfrm>
-            <a:off x="9235440" y="3200400"/>
-            <a:ext cx="2286000" cy="685800"/>
-          </a:xfrm>
-          <a:prstGeom prst="rect">
-            <a:avLst/>
-          </a:prstGeom>
-          <a:noFill/>
-          <a:ln/>
-        </p:spPr>
-        <p:txBody>
-          <a:bodyPr wrap="square" lIns="0" tIns="0" rIns="0" bIns="0" rtlCol="0" anchor="ctr"/>
-          <a:lstStyle/>
-          <a:p>
-            <a:pPr marL="0" indent="0">
-              <a:buNone/>
-              <a:defRPr/>
-            </a:pPr>
-            <a:r>
-              <a:rPr lang="en-US" sz="3600" b="1">
-                <a:solidFill>
-                  <a:srgbClr val="12A58C"/>
-                </a:solidFill>
-                <a:latin typeface="Arial"/>
-                <a:ea typeface="Arial"/>
-                <a:cs typeface="Arial"/>
-              </a:rPr>
-              <a:t>8 / 8</a:t>
-            </a:r>
-            <a:endParaRPr lang="en-US" sz="3600"/>
-          </a:p>
-        </p:txBody>
-      </p:sp>
-      <p:sp>
-        <p:nvSpPr>
-          <p:cNvPr id="827073836" name="Text 10"/>
-          <p:cNvSpPr txBox="1"/>
-          <p:nvPr/>
-        </p:nvSpPr>
-        <p:spPr bwMode="auto">
-          <a:xfrm>
-            <a:off x="9235440" y="3895343"/>
-            <a:ext cx="2286000" cy="457200"/>
-          </a:xfrm>
-          <a:prstGeom prst="rect">
-            <a:avLst/>
-          </a:prstGeom>
-          <a:noFill/>
-          <a:ln/>
-        </p:spPr>
-        <p:txBody>
-          <a:bodyPr wrap="square" lIns="0" tIns="0" rIns="0" bIns="0" rtlCol="0" anchor="t"/>
-          <a:lstStyle/>
-          <a:p>
-            <a:pPr marL="0" indent="0">
-              <a:buNone/>
-              <a:defRPr/>
-            </a:pPr>
-            <a:r>
-              <a:rPr lang="en-US" sz="1200">
-                <a:solidFill>
-                  <a:srgbClr val="1D2A36"/>
-                </a:solidFill>
-                <a:latin typeface="Calibri"/>
-                <a:ea typeface="Calibri"/>
-                <a:cs typeface="Calibri"/>
-              </a:rPr>
-              <a:t>restores bit-identical (SHA-1 match)</a:t>
-            </a:r>
-            <a:endParaRPr lang="en-US" sz="1200"/>
-          </a:p>
-        </p:txBody>
-      </p:sp>
-      <p:sp>
-        <p:nvSpPr>
-          <p:cNvPr id="1159441939" name="Shape 11"/>
-          <p:cNvSpPr/>
-          <p:nvPr/>
-        </p:nvSpPr>
-        <p:spPr bwMode="auto">
-          <a:xfrm>
-            <a:off x="9052560" y="4626864"/>
-            <a:ext cx="2606040" cy="1371600"/>
-          </a:xfrm>
-          <a:prstGeom prst="roundRect">
-            <a:avLst>
-              <a:gd name="adj" fmla="val 8000"/>
-            </a:avLst>
-          </a:prstGeom>
-          <a:solidFill>
-            <a:srgbClr val="EEF4F3"/>
-          </a:solidFill>
-          <a:ln w="12700">
-            <a:solidFill>
-              <a:srgbClr val="EEF4F3"/>
-            </a:solidFill>
-            <a:prstDash val="solid"/>
-          </a:ln>
-        </p:spPr>
-      </p:sp>
-      <p:sp>
-        <p:nvSpPr>
-          <p:cNvPr id="85415891" name="Text 12"/>
-          <p:cNvSpPr txBox="1"/>
-          <p:nvPr/>
-        </p:nvSpPr>
-        <p:spPr bwMode="auto">
-          <a:xfrm>
-            <a:off x="9235440" y="4736592"/>
-            <a:ext cx="2286000" cy="685800"/>
-          </a:xfrm>
-          <a:prstGeom prst="rect">
-            <a:avLst/>
-          </a:prstGeom>
-          <a:noFill/>
-          <a:ln/>
-        </p:spPr>
-        <p:txBody>
-          <a:bodyPr wrap="square" lIns="0" tIns="0" rIns="0" bIns="0" rtlCol="0" anchor="ctr"/>
-          <a:lstStyle/>
-          <a:p>
-            <a:pPr marL="0" indent="0">
-              <a:buNone/>
-              <a:defRPr/>
-            </a:pPr>
-            <a:r>
-              <a:rPr lang="en-US" sz="3600" b="1">
-                <a:solidFill>
-                  <a:srgbClr val="5F6F7E"/>
-                </a:solidFill>
-                <a:latin typeface="Arial"/>
-                <a:ea typeface="Arial"/>
-                <a:cs typeface="Arial"/>
-              </a:rPr>
-              <a:t>0%</a:t>
-            </a:r>
-            <a:endParaRPr lang="en-US" sz="3600"/>
-          </a:p>
-        </p:txBody>
-      </p:sp>
-      <p:sp>
-        <p:nvSpPr>
-          <p:cNvPr id="238537941" name="Text 13"/>
-          <p:cNvSpPr txBox="1"/>
-          <p:nvPr/>
-        </p:nvSpPr>
-        <p:spPr bwMode="auto">
-          <a:xfrm>
-            <a:off x="9235440" y="5431536"/>
-            <a:ext cx="2286000" cy="457200"/>
-          </a:xfrm>
-          <a:prstGeom prst="rect">
-            <a:avLst/>
-          </a:prstGeom>
-          <a:noFill/>
-          <a:ln/>
-        </p:spPr>
-        <p:txBody>
-          <a:bodyPr wrap="square" lIns="0" tIns="0" rIns="0" bIns="0" rtlCol="0" anchor="t"/>
-          <a:lstStyle/>
-          <a:p>
-            <a:pPr marL="0" indent="0">
-              <a:buNone/>
-              <a:defRPr/>
-            </a:pPr>
-            <a:r>
-              <a:rPr lang="en-US" sz="1200">
-                <a:solidFill>
-                  <a:srgbClr val="1D2A36"/>
-                </a:solidFill>
-                <a:latin typeface="Calibri"/>
-                <a:ea typeface="Calibri"/>
-                <a:cs typeface="Calibri"/>
-              </a:rPr>
-              <a:t>gain on random data, so -c is optional</a:t>
-            </a:r>
-            <a:endParaRPr lang="en-US" sz="1200"/>
-          </a:p>
-        </p:txBody>
-      </p:sp>
-      <p:sp>
-        <p:nvSpPr>
-          <p:cNvPr id="351207143" name="Text 14"/>
-          <p:cNvSpPr txBox="1"/>
-          <p:nvPr/>
-        </p:nvSpPr>
-        <p:spPr bwMode="auto">
-          <a:xfrm>
-            <a:off x="4114800" y="6144768"/>
-            <a:ext cx="7543800" cy="274320"/>
-          </a:xfrm>
-          <a:prstGeom prst="rect">
-            <a:avLst/>
-          </a:prstGeom>
-          <a:noFill/>
-          <a:ln/>
-        </p:spPr>
-        <p:txBody>
-          <a:bodyPr wrap="square" lIns="0" tIns="0" rIns="0" bIns="0" rtlCol="0" anchor="ctr"/>
-          <a:lstStyle/>
-          <a:p>
-            <a:pPr marL="0" indent="0">
-              <a:buNone/>
-              <a:defRPr/>
-            </a:pPr>
-            <a:r>
-              <a:rPr lang="en-US" sz="1100" i="1">
-                <a:solidFill>
-                  <a:srgbClr val="5F6F7E"/>
-                </a:solidFill>
-                <a:latin typeface="Calibri"/>
-                <a:ea typeface="Calibri"/>
-                <a:cs typeface="Calibri"/>
-              </a:rPr>
-              <a:t>Every 50 MB backup finished in under 0.25 s (warm cache). Wrong passwords were rejected by OpenSSL.</a:t>
-            </a:r>
-            <a:endParaRPr lang="en-US" sz="1100"/>
-          </a:p>
-        </p:txBody>
-      </p:sp>
-      <p:sp>
-        <p:nvSpPr>
-          <p:cNvPr id="2055478049" name="Text 15"/>
-          <p:cNvSpPr txBox="1"/>
-          <p:nvPr/>
-        </p:nvSpPr>
-        <p:spPr bwMode="auto">
-          <a:xfrm>
-            <a:off x="8869680" y="6419088"/>
-            <a:ext cx="2834640" cy="274320"/>
-          </a:xfrm>
-          <a:prstGeom prst="rect">
-            <a:avLst/>
-          </a:prstGeom>
-          <a:noFill/>
-          <a:ln/>
-        </p:spPr>
-        <p:txBody>
-          <a:bodyPr wrap="square" lIns="0" tIns="0" rIns="0" bIns="0" rtlCol="0" anchor="ctr"/>
-          <a:lstStyle/>
-          <a:p>
-            <a:pPr marL="0" indent="0" algn="r">
-              <a:buNone/>
-              <a:defRPr/>
-            </a:pPr>
-            <a:r>
-              <a:rPr lang="en-US" sz="1000">
-                <a:solidFill>
-                  <a:srgbClr val="5F6F7E"/>
-                </a:solidFill>
-                <a:latin typeface="Calibri"/>
-                <a:ea typeface="Calibri"/>
-                <a:cs typeface="Calibri"/>
-              </a:rPr>
-              <a:t>SafeStore  ·  5</a:t>
-            </a:r>
-            <a:endParaRPr lang="en-US" sz="1000"/>
-          </a:p>
-        </p:txBody>
-      </p:sp>
-    </p:spTree>
-  </p:cSld>
-  <p:clrMapOvr>
-    <a:masterClrMapping/>
-  </p:clrMapOvr>
-  <mc:AlternateContent xmlns:mc="http://schemas.openxmlformats.org/markup-compatibility/2006">
-    <mc:Choice xmlns:p159="http://schemas.microsoft.com/office/powerpoint/2015/09/main" xmlns:p14="http://schemas.microsoft.com/office/powerpoint/2010/main" Requires="p159">
-      <p:transition p14:dur="500" advClick="1"/>
-    </mc:Choice>
-    <mc:Fallback>
-      <p:transition advClick="1"/>
-    </mc:Fallback>
-  </mc:AlternateContent>
-</p:sld>
-</file>
-
-<file path=ppt/slides/slide6.xml><?xml version="1.0" encoding="utf-8"?>
 <p:sld xmlns:a="http://schemas.openxmlformats.org/drawingml/2006/main" xmlns:r="http://schemas.openxmlformats.org/officeDocument/2006/relationships" xmlns:p="http://schemas.openxmlformats.org/presentationml/2006/main" xmlns:m="http://schemas.openxmlformats.org/officeDocument/2006/math" xmlns:w="http://schemas.openxmlformats.org/wordprocessingml/2006/main" xmlns:mc="http://schemas.openxmlformats.org/markup-compatibility/2006" showMasterPhAnim="0" showMasterSp="1" show="1">
   <p:cSld name="Slide 6">
     <p:bg>
@@ -9407,7 +8158,7 @@
       </p:grpSpPr>
       <p:sp>
         <p:nvSpPr>
-          <p:cNvPr id="1252993698" name="Text 0"/>
+          <p:cNvPr id="821514577" name="Text 0"/>
           <p:cNvSpPr txBox="1"/>
           <p:nvPr/>
         </p:nvSpPr>
@@ -9447,7 +8198,7 @@
       </p:sp>
       <p:sp>
         <p:nvSpPr>
-          <p:cNvPr id="1662223985" name="Text 1"/>
+          <p:cNvPr id="526986024" name="Text 1"/>
           <p:cNvSpPr txBox="1"/>
           <p:nvPr/>
         </p:nvSpPr>
@@ -9487,7 +8238,7 @@
       </p:sp>
       <p:sp>
         <p:nvSpPr>
-          <p:cNvPr id="1269641033" name="Text 2"/>
+          <p:cNvPr id="17676432" name="Text 2"/>
           <p:cNvSpPr txBox="1"/>
           <p:nvPr/>
         </p:nvSpPr>
@@ -9527,7 +8278,7 @@
       </p:sp>
       <p:sp>
         <p:nvSpPr>
-          <p:cNvPr id="1636602726" name="Shape 3"/>
+          <p:cNvPr id="2053009734" name="Shape 3"/>
           <p:cNvSpPr/>
           <p:nvPr/>
         </p:nvSpPr>
@@ -9552,7 +8303,7 @@
       </p:sp>
       <p:pic>
         <p:nvPicPr>
-          <p:cNvPr id="1192398105" name="Image 0" descr="preencoded.png"/>
+          <p:cNvPr id="1345402624" name="Image 0" descr="preencoded.png"/>
           <p:cNvPicPr>
             <a:picLocks noChangeAspect="1"/>
           </p:cNvPicPr>
@@ -9574,7 +8325,7 @@
       </p:pic>
       <p:sp>
         <p:nvSpPr>
-          <p:cNvPr id="126812963" name="Text 4"/>
+          <p:cNvPr id="650609673" name="Text 4"/>
           <p:cNvSpPr txBox="1"/>
           <p:nvPr/>
         </p:nvSpPr>
@@ -9614,7 +8365,7 @@
       </p:sp>
       <p:sp>
         <p:nvSpPr>
-          <p:cNvPr id="518258758" name="Text 5"/>
+          <p:cNvPr id="1016542983" name="Text 5"/>
           <p:cNvSpPr txBox="1"/>
           <p:nvPr/>
         </p:nvSpPr>
@@ -9654,7 +8405,7 @@
       </p:sp>
       <p:sp>
         <p:nvSpPr>
-          <p:cNvPr id="1768382226" name="Shape 6"/>
+          <p:cNvPr id="665350833" name="Shape 6"/>
           <p:cNvSpPr/>
           <p:nvPr/>
         </p:nvSpPr>
@@ -9679,7 +8430,7 @@
       </p:sp>
       <p:pic>
         <p:nvPicPr>
-          <p:cNvPr id="1701171061" name="Image 1" descr="preencoded.png"/>
+          <p:cNvPr id="1799483741" name="Image 1" descr="preencoded.png"/>
           <p:cNvPicPr>
             <a:picLocks noChangeAspect="1"/>
           </p:cNvPicPr>
@@ -9701,7 +8452,7 @@
       </p:pic>
       <p:sp>
         <p:nvSpPr>
-          <p:cNvPr id="2027316648" name="Text 7"/>
+          <p:cNvPr id="1282152404" name="Text 7"/>
           <p:cNvSpPr txBox="1"/>
           <p:nvPr/>
         </p:nvSpPr>
@@ -9741,7 +8492,7 @@
       </p:sp>
       <p:sp>
         <p:nvSpPr>
-          <p:cNvPr id="1053319673" name="Text 8"/>
+          <p:cNvPr id="1971728673" name="Text 8"/>
           <p:cNvSpPr txBox="1"/>
           <p:nvPr/>
         </p:nvSpPr>
@@ -9781,7 +8532,7 @@
       </p:sp>
       <p:sp>
         <p:nvSpPr>
-          <p:cNvPr id="1080527544" name="Shape 9"/>
+          <p:cNvPr id="879106574" name="Shape 9"/>
           <p:cNvSpPr/>
           <p:nvPr/>
         </p:nvSpPr>
@@ -9806,7 +8557,7 @@
       </p:sp>
       <p:pic>
         <p:nvPicPr>
-          <p:cNvPr id="2139618397" name="Image 2" descr="preencoded.png"/>
+          <p:cNvPr id="45642490" name="Image 2" descr="preencoded.png"/>
           <p:cNvPicPr>
             <a:picLocks noChangeAspect="1"/>
           </p:cNvPicPr>
@@ -9828,7 +8579,7 @@
       </p:pic>
       <p:sp>
         <p:nvSpPr>
-          <p:cNvPr id="1721166138" name="Text 10"/>
+          <p:cNvPr id="1661860503" name="Text 10"/>
           <p:cNvSpPr txBox="1"/>
           <p:nvPr/>
         </p:nvSpPr>
@@ -9868,7 +8619,7 @@
       </p:sp>
       <p:sp>
         <p:nvSpPr>
-          <p:cNvPr id="1670586472" name="Text 11"/>
+          <p:cNvPr id="29386536" name="Text 11"/>
           <p:cNvSpPr txBox="1"/>
           <p:nvPr/>
         </p:nvSpPr>
@@ -9908,7 +8659,7 @@
       </p:sp>
       <p:sp>
         <p:nvSpPr>
-          <p:cNvPr id="1713379333" name="Shape 12"/>
+          <p:cNvPr id="935546942" name="Shape 12"/>
           <p:cNvSpPr/>
           <p:nvPr/>
         </p:nvSpPr>
@@ -9933,7 +8684,7 @@
       </p:sp>
       <p:pic>
         <p:nvPicPr>
-          <p:cNvPr id="785217528" name="Image 3" descr="preencoded.png"/>
+          <p:cNvPr id="969442474" name="Image 3" descr="preencoded.png"/>
           <p:cNvPicPr>
             <a:picLocks noChangeAspect="1"/>
           </p:cNvPicPr>
@@ -9955,7 +8706,7 @@
       </p:pic>
       <p:sp>
         <p:nvSpPr>
-          <p:cNvPr id="417159310" name="Text 13"/>
+          <p:cNvPr id="837310082" name="Text 13"/>
           <p:cNvSpPr txBox="1"/>
           <p:nvPr/>
         </p:nvSpPr>
@@ -9995,7 +8746,7 @@
       </p:sp>
       <p:sp>
         <p:nvSpPr>
-          <p:cNvPr id="554369333" name="Text 14"/>
+          <p:cNvPr id="329047206" name="Text 14"/>
           <p:cNvSpPr txBox="1"/>
           <p:nvPr/>
         </p:nvSpPr>
@@ -10035,7 +8786,7 @@
       </p:sp>
       <p:sp>
         <p:nvSpPr>
-          <p:cNvPr id="707057022" name="Shape 15"/>
+          <p:cNvPr id="1976740789" name="Shape 15"/>
           <p:cNvSpPr/>
           <p:nvPr/>
         </p:nvSpPr>
@@ -10060,7 +8811,7 @@
       </p:sp>
       <p:pic>
         <p:nvPicPr>
-          <p:cNvPr id="376304678" name="Image 4" descr="preencoded.png"/>
+          <p:cNvPr id="2122365031" name="Image 4" descr="preencoded.png"/>
           <p:cNvPicPr>
             <a:picLocks noChangeAspect="1"/>
           </p:cNvPicPr>
@@ -10082,7 +8833,7 @@
       </p:pic>
       <p:sp>
         <p:nvSpPr>
-          <p:cNvPr id="1159217862" name="Text 16"/>
+          <p:cNvPr id="222610924" name="Text 16"/>
           <p:cNvSpPr txBox="1"/>
           <p:nvPr/>
         </p:nvSpPr>
@@ -10122,7 +8873,7 @@
       </p:sp>
       <p:sp>
         <p:nvSpPr>
-          <p:cNvPr id="565885354" name="Text 17"/>
+          <p:cNvPr id="1864142028" name="Text 17"/>
           <p:cNvSpPr txBox="1"/>
           <p:nvPr/>
         </p:nvSpPr>
@@ -10162,7 +8913,7 @@
       </p:sp>
       <p:sp>
         <p:nvSpPr>
-          <p:cNvPr id="844352389" name="Shape 18"/>
+          <p:cNvPr id="981330206" name="Shape 18"/>
           <p:cNvSpPr/>
           <p:nvPr/>
         </p:nvSpPr>
@@ -10189,7 +8940,7 @@
       </p:sp>
       <p:sp>
         <p:nvSpPr>
-          <p:cNvPr id="900994744" name="Text 19"/>
+          <p:cNvPr id="1188521683" name="Text 19"/>
           <p:cNvSpPr txBox="1"/>
           <p:nvPr/>
         </p:nvSpPr>
@@ -10229,7 +8980,7 @@
       </p:sp>
       <p:sp>
         <p:nvSpPr>
-          <p:cNvPr id="1093996039" name="Shape 20"/>
+          <p:cNvPr id="364820069" name="Shape 20"/>
           <p:cNvSpPr/>
           <p:nvPr/>
         </p:nvSpPr>
@@ -10254,7 +9005,7 @@
       </p:sp>
       <p:sp>
         <p:nvSpPr>
-          <p:cNvPr id="1602811605" name="Text 21"/>
+          <p:cNvPr id="1975725801" name="Text 21"/>
           <p:cNvSpPr txBox="1"/>
           <p:nvPr/>
         </p:nvSpPr>
@@ -10294,7 +9045,7 @@
       </p:sp>
       <p:sp>
         <p:nvSpPr>
-          <p:cNvPr id="1003134590" name="Text 22"/>
+          <p:cNvPr id="409139547" name="Text 22"/>
           <p:cNvSpPr txBox="1"/>
           <p:nvPr/>
         </p:nvSpPr>
@@ -10334,7 +9085,7 @@
       </p:sp>
       <p:sp>
         <p:nvSpPr>
-          <p:cNvPr id="2054094891" name="Text 23"/>
+          <p:cNvPr id="1685658494" name="Text 23"/>
           <p:cNvSpPr txBox="1"/>
           <p:nvPr/>
         </p:nvSpPr>
@@ -10374,7 +9125,7 @@
       </p:sp>
       <p:sp>
         <p:nvSpPr>
-          <p:cNvPr id="1181723180" name="Shape 24"/>
+          <p:cNvPr id="544706535" name="Shape 24"/>
           <p:cNvSpPr/>
           <p:nvPr/>
         </p:nvSpPr>
@@ -10399,7 +9150,7 @@
       </p:sp>
       <p:sp>
         <p:nvSpPr>
-          <p:cNvPr id="1967789619" name="Text 25"/>
+          <p:cNvPr id="1079258328" name="Text 25"/>
           <p:cNvSpPr txBox="1"/>
           <p:nvPr/>
         </p:nvSpPr>
@@ -10439,7 +9190,7 @@
       </p:sp>
       <p:sp>
         <p:nvSpPr>
-          <p:cNvPr id="1722635426" name="Text 26"/>
+          <p:cNvPr id="278537690" name="Text 26"/>
           <p:cNvSpPr txBox="1"/>
           <p:nvPr/>
         </p:nvSpPr>
@@ -10479,7 +9230,7 @@
       </p:sp>
       <p:sp>
         <p:nvSpPr>
-          <p:cNvPr id="1831715641" name="Text 27"/>
+          <p:cNvPr id="2039392172" name="Text 27"/>
           <p:cNvSpPr txBox="1"/>
           <p:nvPr/>
         </p:nvSpPr>
@@ -10519,7 +9270,7 @@
       </p:sp>
       <p:sp>
         <p:nvSpPr>
-          <p:cNvPr id="2136146523" name="Shape 28"/>
+          <p:cNvPr id="1812652603" name="Shape 28"/>
           <p:cNvSpPr/>
           <p:nvPr/>
         </p:nvSpPr>
@@ -10544,7 +9295,7 @@
       </p:sp>
       <p:sp>
         <p:nvSpPr>
-          <p:cNvPr id="234603935" name="Text 29"/>
+          <p:cNvPr id="1201138536" name="Text 29"/>
           <p:cNvSpPr txBox="1"/>
           <p:nvPr/>
         </p:nvSpPr>
@@ -10584,7 +9335,7 @@
       </p:sp>
       <p:sp>
         <p:nvSpPr>
-          <p:cNvPr id="446668185" name="Text 30"/>
+          <p:cNvPr id="1961452968" name="Text 30"/>
           <p:cNvSpPr txBox="1"/>
           <p:nvPr/>
         </p:nvSpPr>
@@ -10624,7 +9375,7 @@
       </p:sp>
       <p:sp>
         <p:nvSpPr>
-          <p:cNvPr id="1792765577" name="Text 31"/>
+          <p:cNvPr id="713771662" name="Text 31"/>
           <p:cNvSpPr txBox="1"/>
           <p:nvPr/>
         </p:nvSpPr>
@@ -10664,7 +9415,7 @@
       </p:sp>
       <p:sp>
         <p:nvSpPr>
-          <p:cNvPr id="252876598" name="Shape 32"/>
+          <p:cNvPr id="1752717171" name="Shape 32"/>
           <p:cNvSpPr/>
           <p:nvPr/>
         </p:nvSpPr>
@@ -10689,7 +9440,7 @@
       </p:sp>
       <p:sp>
         <p:nvSpPr>
-          <p:cNvPr id="911463419" name="Text 33"/>
+          <p:cNvPr id="882018835" name="Text 33"/>
           <p:cNvSpPr txBox="1"/>
           <p:nvPr/>
         </p:nvSpPr>
@@ -10729,7 +9480,7 @@
       </p:sp>
       <p:sp>
         <p:nvSpPr>
-          <p:cNvPr id="575916078" name="Text 34"/>
+          <p:cNvPr id="422316842" name="Text 34"/>
           <p:cNvSpPr txBox="1"/>
           <p:nvPr/>
         </p:nvSpPr>
@@ -10769,7 +9520,7 @@
       </p:sp>
       <p:sp>
         <p:nvSpPr>
-          <p:cNvPr id="301237331" name="Text 35"/>
+          <p:cNvPr id="887379439" name="Text 35"/>
           <p:cNvSpPr txBox="1"/>
           <p:nvPr/>
         </p:nvSpPr>
@@ -10809,7 +9560,7 @@
       </p:sp>
       <p:sp>
         <p:nvSpPr>
-          <p:cNvPr id="1730510139" name="Shape 36"/>
+          <p:cNvPr id="534337914" name="Shape 36"/>
           <p:cNvSpPr/>
           <p:nvPr/>
         </p:nvSpPr>
@@ -10834,7 +9585,7 @@
       </p:sp>
       <p:sp>
         <p:nvSpPr>
-          <p:cNvPr id="640707862" name="Text 37"/>
+          <p:cNvPr id="137739384" name="Text 37"/>
           <p:cNvSpPr txBox="1"/>
           <p:nvPr/>
         </p:nvSpPr>
@@ -10874,7 +9625,7 @@
       </p:sp>
       <p:sp>
         <p:nvSpPr>
-          <p:cNvPr id="133175567" name="Text 38"/>
+          <p:cNvPr id="1408903306" name="Text 38"/>
           <p:cNvSpPr txBox="1"/>
           <p:nvPr/>
         </p:nvSpPr>
@@ -10914,7 +9665,7 @@
       </p:sp>
       <p:sp>
         <p:nvSpPr>
-          <p:cNvPr id="302723976" name="Text 39"/>
+          <p:cNvPr id="2109899163" name="Text 39"/>
           <p:cNvSpPr txBox="1"/>
           <p:nvPr/>
         </p:nvSpPr>
@@ -10954,7 +9705,7 @@
       </p:sp>
       <p:sp>
         <p:nvSpPr>
-          <p:cNvPr id="1975284735" name="Shape 40"/>
+          <p:cNvPr id="425647502" name="Shape 40"/>
           <p:cNvSpPr/>
           <p:nvPr/>
         </p:nvSpPr>
@@ -10979,7 +9730,7 @@
       </p:sp>
       <p:sp>
         <p:nvSpPr>
-          <p:cNvPr id="187899582" name="Text 41"/>
+          <p:cNvPr id="1166338705" name="Text 41"/>
           <p:cNvSpPr txBox="1"/>
           <p:nvPr/>
         </p:nvSpPr>
@@ -11019,7 +9770,7 @@
       </p:sp>
       <p:sp>
         <p:nvSpPr>
-          <p:cNvPr id="1763912246" name="Text 42"/>
+          <p:cNvPr id="1119959957" name="Text 42"/>
           <p:cNvSpPr txBox="1"/>
           <p:nvPr/>
         </p:nvSpPr>
@@ -11059,7 +9810,7 @@
       </p:sp>
       <p:sp>
         <p:nvSpPr>
-          <p:cNvPr id="305755487" name="Text 43"/>
+          <p:cNvPr id="496409035" name="Text 43"/>
           <p:cNvSpPr txBox="1"/>
           <p:nvPr/>
         </p:nvSpPr>
@@ -11099,7 +9850,7 @@
       </p:sp>
       <p:sp>
         <p:nvSpPr>
-          <p:cNvPr id="1879779928" name="Text 44"/>
+          <p:cNvPr id="995678675" name="Text 44"/>
           <p:cNvSpPr txBox="1"/>
           <p:nvPr/>
         </p:nvSpPr>
@@ -11153,7 +9904,7 @@
 </p:sld>
 </file>
 
-<file path=ppt/slides/slide7.xml><?xml version="1.0" encoding="utf-8"?>
+<file path=ppt/slides/slide6.xml><?xml version="1.0" encoding="utf-8"?>
 <p:sld xmlns:a="http://schemas.openxmlformats.org/drawingml/2006/main" xmlns:r="http://schemas.openxmlformats.org/officeDocument/2006/relationships" xmlns:p="http://schemas.openxmlformats.org/presentationml/2006/main" xmlns:m="http://schemas.openxmlformats.org/officeDocument/2006/math" xmlns:w="http://schemas.openxmlformats.org/wordprocessingml/2006/main" xmlns:mc="http://schemas.openxmlformats.org/markup-compatibility/2006" showMasterPhAnim="0" showMasterSp="1" show="1">
   <p:cSld name="Slide 7">
     <p:bg>
@@ -11179,7 +9930,7 @@
       </p:grpSpPr>
       <p:sp>
         <p:nvSpPr>
-          <p:cNvPr id="1134101332" name="Text 0"/>
+          <p:cNvPr id="958389271" name="Text 0"/>
           <p:cNvSpPr txBox="1"/>
           <p:nvPr/>
         </p:nvSpPr>
@@ -11219,7 +9970,7 @@
       </p:sp>
       <p:sp>
         <p:nvSpPr>
-          <p:cNvPr id="1769816968" name="Shape 1"/>
+          <p:cNvPr id="958159467" name="Shape 1"/>
           <p:cNvSpPr/>
           <p:nvPr/>
         </p:nvSpPr>
@@ -11246,7 +9997,7 @@
       </p:sp>
       <p:sp>
         <p:nvSpPr>
-          <p:cNvPr id="2057891839" name="Text 2"/>
+          <p:cNvPr id="531949938" name="Text 2"/>
           <p:cNvSpPr txBox="1"/>
           <p:nvPr/>
         </p:nvSpPr>
@@ -11286,7 +10037,7 @@
       </p:sp>
       <p:sp>
         <p:nvSpPr>
-          <p:cNvPr id="1410750967" name="Text 3"/>
+          <p:cNvPr id="1885653539" name="Text 3"/>
           <p:cNvSpPr txBox="1"/>
           <p:nvPr/>
         </p:nvSpPr>
@@ -11326,7 +10077,7 @@
       </p:sp>
       <p:sp>
         <p:nvSpPr>
-          <p:cNvPr id="1967517779" name="Shape 4"/>
+          <p:cNvPr id="900774803" name="Shape 4"/>
           <p:cNvSpPr/>
           <p:nvPr/>
         </p:nvSpPr>
@@ -11353,7 +10104,7 @@
       </p:sp>
       <p:sp>
         <p:nvSpPr>
-          <p:cNvPr id="595812669" name="Text 5"/>
+          <p:cNvPr id="329151636" name="Text 5"/>
           <p:cNvSpPr txBox="1"/>
           <p:nvPr/>
         </p:nvSpPr>
@@ -11393,7 +10144,7 @@
       </p:sp>
       <p:sp>
         <p:nvSpPr>
-          <p:cNvPr id="2135727143" name="Text 6"/>
+          <p:cNvPr id="1037335108" name="Text 6"/>
           <p:cNvSpPr txBox="1"/>
           <p:nvPr/>
         </p:nvSpPr>
@@ -11433,7 +10184,7 @@
       </p:sp>
       <p:sp>
         <p:nvSpPr>
-          <p:cNvPr id="745842450" name="Shape 7"/>
+          <p:cNvPr id="367830060" name="Shape 7"/>
           <p:cNvSpPr/>
           <p:nvPr/>
         </p:nvSpPr>
@@ -11460,7 +10211,7 @@
       </p:sp>
       <p:sp>
         <p:nvSpPr>
-          <p:cNvPr id="776377056" name="Text 8"/>
+          <p:cNvPr id="572401551" name="Text 8"/>
           <p:cNvSpPr txBox="1"/>
           <p:nvPr/>
         </p:nvSpPr>
@@ -11500,7 +10251,7 @@
       </p:sp>
       <p:sp>
         <p:nvSpPr>
-          <p:cNvPr id="1469823403" name="Text 9"/>
+          <p:cNvPr id="1405708071" name="Text 9"/>
           <p:cNvSpPr txBox="1"/>
           <p:nvPr/>
         </p:nvSpPr>
@@ -11540,7 +10291,7 @@
       </p:sp>
       <p:sp>
         <p:nvSpPr>
-          <p:cNvPr id="930879762" name="Shape 10"/>
+          <p:cNvPr id="268533150" name="Shape 10"/>
           <p:cNvSpPr/>
           <p:nvPr/>
         </p:nvSpPr>
@@ -11567,7 +10318,7 @@
       </p:sp>
       <p:sp>
         <p:nvSpPr>
-          <p:cNvPr id="688132825" name="Text 11"/>
+          <p:cNvPr id="957118564" name="Text 11"/>
           <p:cNvSpPr txBox="1"/>
           <p:nvPr/>
         </p:nvSpPr>
@@ -11607,7 +10358,7 @@
       </p:sp>
       <p:sp>
         <p:nvSpPr>
-          <p:cNvPr id="699088214" name="Text 12"/>
+          <p:cNvPr id="345422906" name="Text 12"/>
           <p:cNvSpPr txBox="1"/>
           <p:nvPr/>
         </p:nvSpPr>
@@ -11647,7 +10398,7 @@
       </p:sp>
       <p:sp>
         <p:nvSpPr>
-          <p:cNvPr id="11095546" name="Text 13"/>
+          <p:cNvPr id="241395264" name="Text 13"/>
           <p:cNvSpPr txBox="1"/>
           <p:nvPr/>
         </p:nvSpPr>
@@ -11687,7 +10438,7 @@
       </p:sp>
       <p:sp>
         <p:nvSpPr>
-          <p:cNvPr id="1728189851" name="Text 14"/>
+          <p:cNvPr id="1827551065" name="Text 14"/>
           <p:cNvSpPr txBox="1"/>
           <p:nvPr/>
         </p:nvSpPr>
@@ -11775,7 +10526,7 @@
       </p:sp>
       <p:sp>
         <p:nvSpPr>
-          <p:cNvPr id="938187245" name="Text 15"/>
+          <p:cNvPr id="963084557" name="Text 15"/>
           <p:cNvSpPr txBox="1"/>
           <p:nvPr/>
         </p:nvSpPr>

--- a/Presentations/SafeStore_Methodology_Review.pptx
+++ b/Presentations/SafeStore_Methodology_Review.pptx
@@ -136,7 +136,7 @@
       </p:grpSpPr>
       <p:sp>
         <p:nvSpPr>
-          <p:cNvPr id="2052889418" name="Header Placeholder 1"/>
+          <p:cNvPr id="183995511" name="Header Placeholder 1"/>
           <p:cNvSpPr>
             <a:spLocks noGrp="1"/>
           </p:cNvSpPr>
@@ -170,7 +170,7 @@
       </p:sp>
       <p:sp>
         <p:nvSpPr>
-          <p:cNvPr id="891981410" name="Date Placeholder 2"/>
+          <p:cNvPr id="1279203604" name="Date Placeholder 2"/>
           <p:cNvSpPr>
             <a:spLocks noGrp="1"/>
           </p:cNvSpPr>
@@ -208,7 +208,7 @@
       </p:sp>
       <p:sp>
         <p:nvSpPr>
-          <p:cNvPr id="855427222" name="Slide Image Placeholder 3"/>
+          <p:cNvPr id="2107288802" name="Slide Image Placeholder 3"/>
           <p:cNvSpPr>
             <a:spLocks noChangeAspect="1" noGrp="1" noRot="1"/>
           </p:cNvSpPr>
@@ -244,7 +244,7 @@
       </p:sp>
       <p:sp>
         <p:nvSpPr>
-          <p:cNvPr id="1122094725" name="Notes Placeholder 4"/>
+          <p:cNvPr id="1379883056" name="Notes Placeholder 4"/>
           <p:cNvSpPr>
             <a:spLocks noGrp="1"/>
           </p:cNvSpPr>
@@ -318,7 +318,7 @@
       </p:sp>
       <p:sp>
         <p:nvSpPr>
-          <p:cNvPr id="1108733091" name="Footer Placeholder 5"/>
+          <p:cNvPr id="2132671275" name="Footer Placeholder 5"/>
           <p:cNvSpPr>
             <a:spLocks noGrp="1"/>
           </p:cNvSpPr>
@@ -352,7 +352,7 @@
       </p:sp>
       <p:sp>
         <p:nvSpPr>
-          <p:cNvPr id="1296975207" name="Slide Number Placeholder 6"/>
+          <p:cNvPr id="881008747" name="Slide Number Placeholder 6"/>
           <p:cNvSpPr>
             <a:spLocks noGrp="1"/>
           </p:cNvSpPr>
@@ -505,7 +505,7 @@
       </p:grpSpPr>
       <p:sp>
         <p:nvSpPr>
-          <p:cNvPr id="1202040975" name="Slide Image Placeholder 1"/>
+          <p:cNvPr id="949633987" name="Slide Image Placeholder 1"/>
           <p:cNvSpPr>
             <a:spLocks noChangeAspect="1" noGrp="1" noRot="1"/>
           </p:cNvSpPr>
@@ -517,7 +517,7 @@
       </p:sp>
       <p:sp>
         <p:nvSpPr>
-          <p:cNvPr id="113910636" name="Notes Placeholder 2"/>
+          <p:cNvPr id="235579976" name="Notes Placeholder 2"/>
           <p:cNvSpPr>
             <a:spLocks noGrp="1"/>
           </p:cNvSpPr>
@@ -533,17 +533,13 @@
             <a:pPr>
               <a:defRPr/>
             </a:pPr>
-            <a:r>
-              <a:rPr lang="en-US"/>
-              <a:t>Introduce the team and the one-line pitch: SafeStore backs up any file or folder with optional compression and encryption, keeps every version, and restores any version interactively.</a:t>
-            </a:r>
             <a:endParaRPr lang="en-US"/>
           </a:p>
         </p:txBody>
       </p:sp>
       <p:sp>
         <p:nvSpPr>
-          <p:cNvPr id="1014824433" name="Slide Number Placeholder 3"/>
+          <p:cNvPr id="448070432" name="Slide Number Placeholder 3"/>
           <p:cNvSpPr>
             <a:spLocks noGrp="1"/>
           </p:cNvSpPr>
@@ -594,7 +590,7 @@
       </p:grpSpPr>
       <p:sp>
         <p:nvSpPr>
-          <p:cNvPr id="1475966941" name="Slide Image Placeholder 1"/>
+          <p:cNvPr id="2107176108" name="Slide Image Placeholder 1"/>
           <p:cNvSpPr>
             <a:spLocks noChangeAspect="1" noGrp="1" noRot="1"/>
           </p:cNvSpPr>
@@ -606,7 +602,7 @@
       </p:sp>
       <p:sp>
         <p:nvSpPr>
-          <p:cNvPr id="1067679613" name="Notes Placeholder 2"/>
+          <p:cNvPr id="412519996" name="Notes Placeholder 2"/>
           <p:cNvSpPr>
             <a:spLocks noGrp="1"/>
           </p:cNvSpPr>
@@ -622,17 +618,13 @@
             <a:pPr>
               <a:defRPr/>
             </a:pPr>
-            <a:r>
-              <a:rPr lang="en-US"/>
-              <a:t>Walk through do_backup(): resolve path, hash it, timestamp, optionally tar+lz4, optionally AES-256 via OpenSSL with PBKDF2, then log to CSV. The same code path produces four storage formats.</a:t>
-            </a:r>
             <a:endParaRPr lang="en-US"/>
           </a:p>
         </p:txBody>
       </p:sp>
       <p:sp>
         <p:nvSpPr>
-          <p:cNvPr id="503420835" name="Slide Number Placeholder 3"/>
+          <p:cNvPr id="295467972" name="Slide Number Placeholder 3"/>
           <p:cNvSpPr>
             <a:spLocks noGrp="1"/>
           </p:cNvSpPr>
@@ -683,7 +675,7 @@
       </p:grpSpPr>
       <p:sp>
         <p:nvSpPr>
-          <p:cNvPr id="1697464175" name="Slide Image Placeholder 1"/>
+          <p:cNvPr id="1070730832" name="Slide Image Placeholder 1"/>
           <p:cNvSpPr>
             <a:spLocks noChangeAspect="1" noGrp="1" noRot="1"/>
           </p:cNvSpPr>
@@ -695,7 +687,7 @@
       </p:sp>
       <p:sp>
         <p:nvSpPr>
-          <p:cNvPr id="1695903569" name="Notes Placeholder 2"/>
+          <p:cNvPr id="1213486471" name="Notes Placeholder 2"/>
           <p:cNvSpPr>
             <a:spLocks noGrp="1"/>
           </p:cNvSpPr>
@@ -711,17 +703,13 @@
             <a:pPr>
               <a:defRPr/>
             </a:pPr>
-            <a:r>
-              <a:rPr lang="en-US"/>
-              <a:t>Emphasise that the novelty is in the combination: zero-setup, per-backup choice of compression/encryption, and a restore that figures out the format by itself. Be honest that dedup-based tools are more storage-efficient.</a:t>
-            </a:r>
             <a:endParaRPr lang="en-US"/>
           </a:p>
         </p:txBody>
       </p:sp>
       <p:sp>
         <p:nvSpPr>
-          <p:cNvPr id="1911034614" name="Slide Number Placeholder 3"/>
+          <p:cNvPr id="656738320" name="Slide Number Placeholder 3"/>
           <p:cNvSpPr>
             <a:spLocks noGrp="1"/>
           </p:cNvSpPr>
@@ -772,7 +760,7 @@
       </p:grpSpPr>
       <p:sp>
         <p:nvSpPr>
-          <p:cNvPr id="811448319" name="Slide Image Placeholder 1"/>
+          <p:cNvPr id="1616278348" name="Slide Image Placeholder 1"/>
           <p:cNvSpPr>
             <a:spLocks noChangeAspect="1" noGrp="1" noRot="1"/>
           </p:cNvSpPr>
@@ -784,7 +772,7 @@
       </p:sp>
       <p:sp>
         <p:nvSpPr>
-          <p:cNvPr id="1923688350" name="Notes Placeholder 2"/>
+          <p:cNvPr id="1525871392" name="Notes Placeholder 2"/>
           <p:cNvSpPr>
             <a:spLocks noGrp="1"/>
           </p:cNvSpPr>
@@ -800,17 +788,13 @@
             <a:pPr>
               <a:defRPr/>
             </a:pPr>
-            <a:r>
-              <a:rPr lang="en-US"/>
-              <a:t>Adaptability shows up at three levels: the user adapts the pipeline per backup, a developer swaps a back-end module, and the tool fits different user groups without configuration.</a:t>
-            </a:r>
             <a:endParaRPr lang="en-US"/>
           </a:p>
         </p:txBody>
       </p:sp>
       <p:sp>
         <p:nvSpPr>
-          <p:cNvPr id="1818074609" name="Slide Number Placeholder 3"/>
+          <p:cNvPr id="1112606702" name="Slide Number Placeholder 3"/>
           <p:cNvSpPr>
             <a:spLocks noGrp="1"/>
           </p:cNvSpPr>
@@ -861,7 +845,7 @@
       </p:grpSpPr>
       <p:sp>
         <p:nvSpPr>
-          <p:cNvPr id="866516306" name="Slide Image Placeholder 1"/>
+          <p:cNvPr id="1840250820" name="Slide Image Placeholder 1"/>
           <p:cNvSpPr>
             <a:spLocks noChangeAspect="1" noGrp="1" noRot="1"/>
           </p:cNvSpPr>
@@ -873,7 +857,7 @@
       </p:sp>
       <p:sp>
         <p:nvSpPr>
-          <p:cNvPr id="1296538436" name="Notes Placeholder 2"/>
+          <p:cNvPr id="2145539212" name="Notes Placeholder 2"/>
           <p:cNvSpPr>
             <a:spLocks noGrp="1"/>
           </p:cNvSpPr>
@@ -889,17 +873,13 @@
             <a:pPr>
               <a:defRPr/>
             </a:pPr>
-            <a:r>
-              <a:rPr lang="en-US"/>
-              <a:t>Accessibility is strong by design: open formats mean nobody is locked in. Dissemination is the weakest area today, so present the concrete plan: README, licence, man page, packages, and a demo video.</a:t>
-            </a:r>
             <a:endParaRPr lang="en-US"/>
           </a:p>
         </p:txBody>
       </p:sp>
       <p:sp>
         <p:nvSpPr>
-          <p:cNvPr id="1537170659" name="Slide Number Placeholder 3"/>
+          <p:cNvPr id="1339620985" name="Slide Number Placeholder 3"/>
           <p:cNvSpPr>
             <a:spLocks noGrp="1"/>
           </p:cNvSpPr>
@@ -950,7 +930,7 @@
       </p:grpSpPr>
       <p:sp>
         <p:nvSpPr>
-          <p:cNvPr id="2016551213" name="Slide Image Placeholder 1"/>
+          <p:cNvPr id="105727458" name="Slide Image Placeholder 1"/>
           <p:cNvSpPr>
             <a:spLocks noChangeAspect="1" noGrp="1" noRot="1"/>
           </p:cNvSpPr>
@@ -962,7 +942,7 @@
       </p:sp>
       <p:sp>
         <p:nvSpPr>
-          <p:cNvPr id="175575428" name="Notes Placeholder 2"/>
+          <p:cNvPr id="1377289955" name="Notes Placeholder 2"/>
           <p:cNvSpPr>
             <a:spLocks noGrp="1"/>
           </p:cNvSpPr>
@@ -978,17 +958,13 @@
             <a:pPr>
               <a:defRPr/>
             </a:pPr>
-            <a:r>
-              <a:rPr lang="en-US"/>
-              <a:t>Summarise one point per criterion, then close with future work and invite questions.</a:t>
-            </a:r>
             <a:endParaRPr lang="en-US"/>
           </a:p>
         </p:txBody>
       </p:sp>
       <p:sp>
         <p:nvSpPr>
-          <p:cNvPr id="1331014098" name="Slide Number Placeholder 3"/>
+          <p:cNvPr id="351540084" name="Slide Number Placeholder 3"/>
           <p:cNvSpPr>
             <a:spLocks noGrp="1"/>
           </p:cNvSpPr>
@@ -1353,7 +1329,7 @@
       </p:grpSpPr>
       <p:sp>
         <p:nvSpPr>
-          <p:cNvPr id="228666581" name="Shape 0"/>
+          <p:cNvPr id="1927132739" name="Shape 0"/>
           <p:cNvSpPr/>
           <p:nvPr/>
         </p:nvSpPr>
@@ -1378,7 +1354,7 @@
       </p:sp>
       <p:pic>
         <p:nvPicPr>
-          <p:cNvPr id="1118858376" name="Image 0" descr="preencoded.png"/>
+          <p:cNvPr id="1326794630" name="Image 0" descr="preencoded.png"/>
           <p:cNvPicPr>
             <a:picLocks noChangeAspect="1"/>
           </p:cNvPicPr>
@@ -1400,7 +1376,7 @@
       </p:pic>
       <p:sp>
         <p:nvSpPr>
-          <p:cNvPr id="1745531976" name="Text 1"/>
+          <p:cNvPr id="352380674" name="Text 1"/>
           <p:cNvSpPr txBox="1"/>
           <p:nvPr/>
         </p:nvSpPr>
@@ -1440,7 +1416,7 @@
       </p:sp>
       <p:sp>
         <p:nvSpPr>
-          <p:cNvPr id="362927913" name="Text 2"/>
+          <p:cNvPr id="2119483091" name="Text 2"/>
           <p:cNvSpPr txBox="1"/>
           <p:nvPr/>
         </p:nvSpPr>
@@ -1480,7 +1456,7 @@
       </p:sp>
       <p:sp>
         <p:nvSpPr>
-          <p:cNvPr id="1552830071" name="Text 3"/>
+          <p:cNvPr id="2078927717" name="Text 3"/>
           <p:cNvSpPr txBox="1"/>
           <p:nvPr/>
         </p:nvSpPr>
@@ -1520,7 +1496,7 @@
       </p:sp>
       <p:sp>
         <p:nvSpPr>
-          <p:cNvPr id="524613018" name="Shape 4"/>
+          <p:cNvPr id="1397495061" name="Shape 4"/>
           <p:cNvSpPr/>
           <p:nvPr/>
         </p:nvSpPr>
@@ -1547,7 +1523,7 @@
       </p:sp>
       <p:sp>
         <p:nvSpPr>
-          <p:cNvPr id="2030438258" name="Text 5"/>
+          <p:cNvPr id="1424971113" name="Text 5"/>
           <p:cNvSpPr txBox="1"/>
           <p:nvPr/>
         </p:nvSpPr>
@@ -1685,7 +1661,7 @@
       </p:sp>
       <p:sp>
         <p:nvSpPr>
-          <p:cNvPr id="167316573" name="Shape 6"/>
+          <p:cNvPr id="1787089070" name="Shape 6"/>
           <p:cNvSpPr/>
           <p:nvPr/>
         </p:nvSpPr>
@@ -1712,7 +1688,7 @@
       </p:sp>
       <p:sp>
         <p:nvSpPr>
-          <p:cNvPr id="1075641470" name="Text 7"/>
+          <p:cNvPr id="2052026150" name="Text 7"/>
           <p:cNvSpPr txBox="1"/>
           <p:nvPr/>
         </p:nvSpPr>
@@ -1797,7 +1773,7 @@
       </p:sp>
       <p:sp>
         <p:nvSpPr>
-          <p:cNvPr id="922730751" name="Text 8"/>
+          <p:cNvPr id="290138302" name="Text 8"/>
           <p:cNvSpPr txBox="1"/>
           <p:nvPr/>
         </p:nvSpPr>
@@ -1877,7 +1853,7 @@
       </p:grpSpPr>
       <p:sp>
         <p:nvSpPr>
-          <p:cNvPr id="422363093" name="Text 0"/>
+          <p:cNvPr id="696399626" name="Text 0"/>
           <p:cNvSpPr txBox="1"/>
           <p:nvPr/>
         </p:nvSpPr>
@@ -1917,7 +1893,7 @@
       </p:sp>
       <p:sp>
         <p:nvSpPr>
-          <p:cNvPr id="265030178" name="Text 1"/>
+          <p:cNvPr id="1910810885" name="Text 1"/>
           <p:cNvSpPr txBox="1"/>
           <p:nvPr/>
         </p:nvSpPr>
@@ -1957,7 +1933,7 @@
       </p:sp>
       <p:sp>
         <p:nvSpPr>
-          <p:cNvPr id="318154238" name="Shape 2"/>
+          <p:cNvPr id="1754224536" name="Shape 2"/>
           <p:cNvSpPr/>
           <p:nvPr/>
         </p:nvSpPr>
@@ -1984,7 +1960,7 @@
       </p:sp>
       <p:sp>
         <p:nvSpPr>
-          <p:cNvPr id="90195063" name="Text 3"/>
+          <p:cNvPr id="220879911" name="Text 3"/>
           <p:cNvSpPr txBox="1"/>
           <p:nvPr/>
         </p:nvSpPr>
@@ -2024,7 +2000,7 @@
       </p:sp>
       <p:sp>
         <p:nvSpPr>
-          <p:cNvPr id="683495949" name="Text 4"/>
+          <p:cNvPr id="486580054" name="Text 4"/>
           <p:cNvSpPr txBox="1"/>
           <p:nvPr/>
         </p:nvSpPr>
@@ -2064,7 +2040,7 @@
       </p:sp>
       <p:sp>
         <p:nvSpPr>
-          <p:cNvPr id="2008000922" name="Text 5"/>
+          <p:cNvPr id="262101864" name="Text 5"/>
           <p:cNvSpPr txBox="1"/>
           <p:nvPr/>
         </p:nvSpPr>
@@ -2104,7 +2080,7 @@
       </p:sp>
       <p:sp>
         <p:nvSpPr>
-          <p:cNvPr id="1835807089" name="Shape 6"/>
+          <p:cNvPr id="730014379" name="Shape 6"/>
           <p:cNvSpPr/>
           <p:nvPr/>
         </p:nvSpPr>
@@ -2131,7 +2107,7 @@
       </p:sp>
       <p:sp>
         <p:nvSpPr>
-          <p:cNvPr id="521254901" name="Text 7"/>
+          <p:cNvPr id="709781681" name="Text 7"/>
           <p:cNvSpPr txBox="1"/>
           <p:nvPr/>
         </p:nvSpPr>
@@ -2171,7 +2147,7 @@
       </p:sp>
       <p:sp>
         <p:nvSpPr>
-          <p:cNvPr id="559725191" name="Text 8"/>
+          <p:cNvPr id="228235506" name="Text 8"/>
           <p:cNvSpPr txBox="1"/>
           <p:nvPr/>
         </p:nvSpPr>
@@ -2211,7 +2187,7 @@
       </p:sp>
       <p:sp>
         <p:nvSpPr>
-          <p:cNvPr id="1056456695" name="Text 9"/>
+          <p:cNvPr id="1956309775" name="Text 9"/>
           <p:cNvSpPr txBox="1"/>
           <p:nvPr/>
         </p:nvSpPr>
@@ -2251,7 +2227,7 @@
       </p:sp>
       <p:sp>
         <p:nvSpPr>
-          <p:cNvPr id="2028316015" name="Shape 10"/>
+          <p:cNvPr id="39052752" name="Shape 10"/>
           <p:cNvSpPr/>
           <p:nvPr/>
         </p:nvSpPr>
@@ -2278,7 +2254,7 @@
       </p:sp>
       <p:sp>
         <p:nvSpPr>
-          <p:cNvPr id="572430074" name="Text 11"/>
+          <p:cNvPr id="1812012376" name="Text 11"/>
           <p:cNvSpPr txBox="1"/>
           <p:nvPr/>
         </p:nvSpPr>
@@ -2318,7 +2294,7 @@
       </p:sp>
       <p:sp>
         <p:nvSpPr>
-          <p:cNvPr id="1420133618" name="Text 12"/>
+          <p:cNvPr id="1737324264" name="Text 12"/>
           <p:cNvSpPr txBox="1"/>
           <p:nvPr/>
         </p:nvSpPr>
@@ -2358,7 +2334,7 @@
       </p:sp>
       <p:sp>
         <p:nvSpPr>
-          <p:cNvPr id="1677232751" name="Text 13"/>
+          <p:cNvPr id="12464779" name="Text 13"/>
           <p:cNvSpPr txBox="1"/>
           <p:nvPr/>
         </p:nvSpPr>
@@ -2398,7 +2374,7 @@
       </p:sp>
       <p:sp>
         <p:nvSpPr>
-          <p:cNvPr id="514404328" name="Shape 14"/>
+          <p:cNvPr id="259158909" name="Shape 14"/>
           <p:cNvSpPr/>
           <p:nvPr/>
         </p:nvSpPr>
@@ -2425,7 +2401,7 @@
       </p:sp>
       <p:sp>
         <p:nvSpPr>
-          <p:cNvPr id="847240618" name="Text 15"/>
+          <p:cNvPr id="1762253138" name="Text 15"/>
           <p:cNvSpPr txBox="1"/>
           <p:nvPr/>
         </p:nvSpPr>
@@ -2465,7 +2441,7 @@
       </p:sp>
       <p:sp>
         <p:nvSpPr>
-          <p:cNvPr id="20515964" name="Text 16"/>
+          <p:cNvPr id="1013329878" name="Text 16"/>
           <p:cNvSpPr txBox="1"/>
           <p:nvPr/>
         </p:nvSpPr>
@@ -2505,7 +2481,7 @@
       </p:sp>
       <p:sp>
         <p:nvSpPr>
-          <p:cNvPr id="1977338374" name="Text 17"/>
+          <p:cNvPr id="536656634" name="Text 17"/>
           <p:cNvSpPr txBox="1"/>
           <p:nvPr/>
         </p:nvSpPr>
@@ -2545,7 +2521,7 @@
       </p:sp>
       <p:sp>
         <p:nvSpPr>
-          <p:cNvPr id="1206734331" name="Shape 18"/>
+          <p:cNvPr id="1209200797" name="Shape 18"/>
           <p:cNvSpPr/>
           <p:nvPr/>
         </p:nvSpPr>
@@ -2572,7 +2548,7 @@
       </p:sp>
       <p:sp>
         <p:nvSpPr>
-          <p:cNvPr id="1678522402" name="Text 19"/>
+          <p:cNvPr id="60033692" name="Text 19"/>
           <p:cNvSpPr txBox="1"/>
           <p:nvPr/>
         </p:nvSpPr>
@@ -2612,7 +2588,7 @@
       </p:sp>
       <p:sp>
         <p:nvSpPr>
-          <p:cNvPr id="2008715504" name="Text 20"/>
+          <p:cNvPr id="1244101638" name="Text 20"/>
           <p:cNvSpPr txBox="1"/>
           <p:nvPr/>
         </p:nvSpPr>
@@ -2652,7 +2628,7 @@
       </p:sp>
       <p:sp>
         <p:nvSpPr>
-          <p:cNvPr id="1156516331" name="Text 21"/>
+          <p:cNvPr id="738582355" name="Text 21"/>
           <p:cNvSpPr txBox="1"/>
           <p:nvPr/>
         </p:nvSpPr>
@@ -2692,7 +2668,7 @@
       </p:sp>
       <p:sp>
         <p:nvSpPr>
-          <p:cNvPr id="340770250" name="Shape 22"/>
+          <p:cNvPr id="318568304" name="Shape 22"/>
           <p:cNvSpPr/>
           <p:nvPr/>
         </p:nvSpPr>
@@ -2719,7 +2695,7 @@
       </p:sp>
       <p:sp>
         <p:nvSpPr>
-          <p:cNvPr id="1144132402" name="Text 23"/>
+          <p:cNvPr id="1222963628" name="Text 23"/>
           <p:cNvSpPr txBox="1"/>
           <p:nvPr/>
         </p:nvSpPr>
@@ -2759,7 +2735,7 @@
       </p:sp>
       <p:sp>
         <p:nvSpPr>
-          <p:cNvPr id="1425618913" name="Text 24"/>
+          <p:cNvPr id="1456297718" name="Text 24"/>
           <p:cNvSpPr txBox="1"/>
           <p:nvPr/>
         </p:nvSpPr>
@@ -2799,7 +2775,7 @@
       </p:sp>
       <p:sp>
         <p:nvSpPr>
-          <p:cNvPr id="1629209593" name="Text 25"/>
+          <p:cNvPr id="370838815" name="Text 25"/>
           <p:cNvSpPr txBox="1"/>
           <p:nvPr/>
         </p:nvSpPr>
@@ -2839,7 +2815,7 @@
       </p:sp>
       <p:graphicFrame>
         <p:nvGraphicFramePr>
-          <p:cNvPr id="1586334327" name="Table 0"/>
+          <p:cNvPr id="837118692" name="Table 0"/>
           <p:cNvGraphicFramePr>
             <a:graphicFrameLocks xmlns:a="http://schemas.openxmlformats.org/drawingml/2006/main" noGrp="1"/>
           </p:cNvGraphicFramePr>
@@ -3618,7 +3594,7 @@
       </p:graphicFrame>
       <p:sp>
         <p:nvSpPr>
-          <p:cNvPr id="131517669" name="Shape 26"/>
+          <p:cNvPr id="2035223246" name="Shape 26"/>
           <p:cNvSpPr/>
           <p:nvPr/>
         </p:nvSpPr>
@@ -3645,7 +3621,7 @@
       </p:sp>
       <p:sp>
         <p:nvSpPr>
-          <p:cNvPr id="749405881" name="Text 27"/>
+          <p:cNvPr id="1865087255" name="Text 27"/>
           <p:cNvSpPr txBox="1"/>
           <p:nvPr/>
         </p:nvSpPr>
@@ -3685,7 +3661,7 @@
       </p:sp>
       <p:sp>
         <p:nvSpPr>
-          <p:cNvPr id="2115903276" name="Text 28"/>
+          <p:cNvPr id="180904641" name="Text 28"/>
           <p:cNvSpPr txBox="1"/>
           <p:nvPr/>
         </p:nvSpPr>
@@ -3833,7 +3809,7 @@
       </p:sp>
       <p:sp>
         <p:nvSpPr>
-          <p:cNvPr id="1090476854" name="Text 29"/>
+          <p:cNvPr id="711224794" name="Text 29"/>
           <p:cNvSpPr txBox="1"/>
           <p:nvPr/>
         </p:nvSpPr>
@@ -3873,7 +3849,7 @@
       </p:sp>
       <p:sp>
         <p:nvSpPr>
-          <p:cNvPr id="966545579" name="Text 30"/>
+          <p:cNvPr id="865629476" name="Text 30"/>
           <p:cNvSpPr txBox="1"/>
           <p:nvPr/>
         </p:nvSpPr>
@@ -3953,7 +3929,7 @@
       </p:grpSpPr>
       <p:sp>
         <p:nvSpPr>
-          <p:cNvPr id="103376957" name="Text 0"/>
+          <p:cNvPr id="582914495" name="Text 0"/>
           <p:cNvSpPr txBox="1"/>
           <p:nvPr/>
         </p:nvSpPr>
@@ -3993,7 +3969,7 @@
       </p:sp>
       <p:sp>
         <p:nvSpPr>
-          <p:cNvPr id="808438127" name="Text 1"/>
+          <p:cNvPr id="2091397196" name="Text 1"/>
           <p:cNvSpPr txBox="1"/>
           <p:nvPr/>
         </p:nvSpPr>
@@ -4033,7 +4009,7 @@
       </p:sp>
       <p:sp>
         <p:nvSpPr>
-          <p:cNvPr id="157906568" name="Shape 2"/>
+          <p:cNvPr id="1659474104" name="Shape 2"/>
           <p:cNvSpPr/>
           <p:nvPr/>
         </p:nvSpPr>
@@ -4058,7 +4034,7 @@
       </p:sp>
       <p:pic>
         <p:nvPicPr>
-          <p:cNvPr id="1507930780" name="Image 0" descr="preencoded.png"/>
+          <p:cNvPr id="893753073" name="Image 0" descr="preencoded.png"/>
           <p:cNvPicPr>
             <a:picLocks noChangeAspect="1"/>
           </p:cNvPicPr>
@@ -4080,7 +4056,7 @@
       </p:pic>
       <p:sp>
         <p:nvSpPr>
-          <p:cNvPr id="1497716864" name="Text 3"/>
+          <p:cNvPr id="1407186377" name="Text 3"/>
           <p:cNvSpPr txBox="1"/>
           <p:nvPr/>
         </p:nvSpPr>
@@ -4120,7 +4096,7 @@
       </p:sp>
       <p:sp>
         <p:nvSpPr>
-          <p:cNvPr id="368252031" name="Text 4"/>
+          <p:cNvPr id="1240154337" name="Text 4"/>
           <p:cNvSpPr txBox="1"/>
           <p:nvPr/>
         </p:nvSpPr>
@@ -4160,7 +4136,7 @@
       </p:sp>
       <p:sp>
         <p:nvSpPr>
-          <p:cNvPr id="2140922436" name="Shape 5"/>
+          <p:cNvPr id="2032390111" name="Shape 5"/>
           <p:cNvSpPr/>
           <p:nvPr/>
         </p:nvSpPr>
@@ -4185,7 +4161,7 @@
       </p:sp>
       <p:pic>
         <p:nvPicPr>
-          <p:cNvPr id="646526080" name="Image 1" descr="preencoded.png"/>
+          <p:cNvPr id="1709051391" name="Image 1" descr="preencoded.png"/>
           <p:cNvPicPr>
             <a:picLocks noChangeAspect="1"/>
           </p:cNvPicPr>
@@ -4207,7 +4183,7 @@
       </p:pic>
       <p:sp>
         <p:nvSpPr>
-          <p:cNvPr id="1542905430" name="Text 6"/>
+          <p:cNvPr id="1208901049" name="Text 6"/>
           <p:cNvSpPr txBox="1"/>
           <p:nvPr/>
         </p:nvSpPr>
@@ -4247,7 +4223,7 @@
       </p:sp>
       <p:sp>
         <p:nvSpPr>
-          <p:cNvPr id="1221629825" name="Text 7"/>
+          <p:cNvPr id="579752325" name="Text 7"/>
           <p:cNvSpPr txBox="1"/>
           <p:nvPr/>
         </p:nvSpPr>
@@ -4287,7 +4263,7 @@
       </p:sp>
       <p:sp>
         <p:nvSpPr>
-          <p:cNvPr id="1982390663" name="Shape 8"/>
+          <p:cNvPr id="1986443153" name="Shape 8"/>
           <p:cNvSpPr/>
           <p:nvPr/>
         </p:nvSpPr>
@@ -4312,7 +4288,7 @@
       </p:sp>
       <p:pic>
         <p:nvPicPr>
-          <p:cNvPr id="1295638587" name="Image 2" descr="preencoded.png"/>
+          <p:cNvPr id="2062998362" name="Image 2" descr="preencoded.png"/>
           <p:cNvPicPr>
             <a:picLocks noChangeAspect="1"/>
           </p:cNvPicPr>
@@ -4334,7 +4310,7 @@
       </p:pic>
       <p:sp>
         <p:nvSpPr>
-          <p:cNvPr id="1347153820" name="Text 9"/>
+          <p:cNvPr id="1095471365" name="Text 9"/>
           <p:cNvSpPr txBox="1"/>
           <p:nvPr/>
         </p:nvSpPr>
@@ -4374,7 +4350,7 @@
       </p:sp>
       <p:sp>
         <p:nvSpPr>
-          <p:cNvPr id="1815680847" name="Text 10"/>
+          <p:cNvPr id="441163194" name="Text 10"/>
           <p:cNvSpPr txBox="1"/>
           <p:nvPr/>
         </p:nvSpPr>
@@ -4414,7 +4390,7 @@
       </p:sp>
       <p:sp>
         <p:nvSpPr>
-          <p:cNvPr id="181084258" name="Shape 11"/>
+          <p:cNvPr id="1353002940" name="Shape 11"/>
           <p:cNvSpPr/>
           <p:nvPr/>
         </p:nvSpPr>
@@ -4439,7 +4415,7 @@
       </p:sp>
       <p:pic>
         <p:nvPicPr>
-          <p:cNvPr id="249071080" name="Image 3" descr="preencoded.png"/>
+          <p:cNvPr id="215025664" name="Image 3" descr="preencoded.png"/>
           <p:cNvPicPr>
             <a:picLocks noChangeAspect="1"/>
           </p:cNvPicPr>
@@ -4461,7 +4437,7 @@
       </p:pic>
       <p:sp>
         <p:nvSpPr>
-          <p:cNvPr id="670300007" name="Text 12"/>
+          <p:cNvPr id="1903618038" name="Text 12"/>
           <p:cNvSpPr txBox="1"/>
           <p:nvPr/>
         </p:nvSpPr>
@@ -4501,7 +4477,7 @@
       </p:sp>
       <p:sp>
         <p:nvSpPr>
-          <p:cNvPr id="52064500" name="Text 13"/>
+          <p:cNvPr id="2045750378" name="Text 13"/>
           <p:cNvSpPr txBox="1"/>
           <p:nvPr/>
         </p:nvSpPr>
@@ -4541,7 +4517,7 @@
       </p:sp>
       <p:sp>
         <p:nvSpPr>
-          <p:cNvPr id="1033556255" name="Shape 14"/>
+          <p:cNvPr id="1445491925" name="Shape 14"/>
           <p:cNvSpPr/>
           <p:nvPr/>
         </p:nvSpPr>
@@ -4566,7 +4542,7 @@
       </p:sp>
       <p:pic>
         <p:nvPicPr>
-          <p:cNvPr id="774232567" name="Image 4" descr="preencoded.png"/>
+          <p:cNvPr id="651593627" name="Image 4" descr="preencoded.png"/>
           <p:cNvPicPr>
             <a:picLocks noChangeAspect="1"/>
           </p:cNvPicPr>
@@ -4588,7 +4564,7 @@
       </p:pic>
       <p:sp>
         <p:nvSpPr>
-          <p:cNvPr id="835644919" name="Text 15"/>
+          <p:cNvPr id="15967462" name="Text 15"/>
           <p:cNvSpPr txBox="1"/>
           <p:nvPr/>
         </p:nvSpPr>
@@ -4628,7 +4604,7 @@
       </p:sp>
       <p:sp>
         <p:nvSpPr>
-          <p:cNvPr id="2120240479" name="Text 16"/>
+          <p:cNvPr id="1357789273" name="Text 16"/>
           <p:cNvSpPr txBox="1"/>
           <p:nvPr/>
         </p:nvSpPr>
@@ -4668,7 +4644,7 @@
       </p:sp>
       <p:sp>
         <p:nvSpPr>
-          <p:cNvPr id="433337546" name="Text 17"/>
+          <p:cNvPr id="1859305210" name="Text 17"/>
           <p:cNvSpPr txBox="1"/>
           <p:nvPr/>
         </p:nvSpPr>
@@ -4708,7 +4684,7 @@
       </p:sp>
       <p:graphicFrame>
         <p:nvGraphicFramePr>
-          <p:cNvPr id="924103737" name="Table 0"/>
+          <p:cNvPr id="1362543154" name="Table 0"/>
           <p:cNvGraphicFramePr>
             <a:graphicFrameLocks xmlns:a="http://schemas.openxmlformats.org/drawingml/2006/main" noGrp="1"/>
           </p:cNvGraphicFramePr>
@@ -6307,7 +6283,7 @@
       </p:graphicFrame>
       <p:sp>
         <p:nvSpPr>
-          <p:cNvPr id="1258006169" name="Text 18"/>
+          <p:cNvPr id="540108133" name="Text 18"/>
           <p:cNvSpPr txBox="1"/>
           <p:nvPr/>
         </p:nvSpPr>
@@ -6347,7 +6323,7 @@
       </p:sp>
       <p:sp>
         <p:nvSpPr>
-          <p:cNvPr id="247729972" name="Text 19"/>
+          <p:cNvPr id="805874598" name="Text 19"/>
           <p:cNvSpPr txBox="1"/>
           <p:nvPr/>
         </p:nvSpPr>
@@ -6427,7 +6403,7 @@
       </p:grpSpPr>
       <p:sp>
         <p:nvSpPr>
-          <p:cNvPr id="1795681773" name="Text 0"/>
+          <p:cNvPr id="1612477533" name="Text 0"/>
           <p:cNvSpPr txBox="1"/>
           <p:nvPr/>
         </p:nvSpPr>
@@ -6467,7 +6443,7 @@
       </p:sp>
       <p:sp>
         <p:nvSpPr>
-          <p:cNvPr id="1403169395" name="Text 1"/>
+          <p:cNvPr id="621259909" name="Text 1"/>
           <p:cNvSpPr txBox="1"/>
           <p:nvPr/>
         </p:nvSpPr>
@@ -6507,7 +6483,7 @@
       </p:sp>
       <p:sp>
         <p:nvSpPr>
-          <p:cNvPr id="567558680" name="Text 2"/>
+          <p:cNvPr id="935278186" name="Text 2"/>
           <p:cNvSpPr txBox="1"/>
           <p:nvPr/>
         </p:nvSpPr>
@@ -6547,7 +6523,7 @@
       </p:sp>
       <p:sp>
         <p:nvSpPr>
-          <p:cNvPr id="1458433817" name="Shape 3"/>
+          <p:cNvPr id="478901988" name="Shape 3"/>
           <p:cNvSpPr/>
           <p:nvPr/>
         </p:nvSpPr>
@@ -6574,7 +6550,7 @@
       </p:sp>
       <p:sp>
         <p:nvSpPr>
-          <p:cNvPr id="1811036587" name="Text 4"/>
+          <p:cNvPr id="1856407210" name="Text 4"/>
           <p:cNvSpPr txBox="1"/>
           <p:nvPr/>
         </p:nvSpPr>
@@ -6614,7 +6590,7 @@
       </p:sp>
       <p:sp>
         <p:nvSpPr>
-          <p:cNvPr id="853426261" name="Text 5"/>
+          <p:cNvPr id="1579847713" name="Text 5"/>
           <p:cNvSpPr txBox="1"/>
           <p:nvPr/>
         </p:nvSpPr>
@@ -6654,7 +6630,7 @@
       </p:sp>
       <p:sp>
         <p:nvSpPr>
-          <p:cNvPr id="1388737173" name="Shape 6"/>
+          <p:cNvPr id="647131036" name="Shape 6"/>
           <p:cNvSpPr/>
           <p:nvPr/>
         </p:nvSpPr>
@@ -6681,7 +6657,7 @@
       </p:sp>
       <p:sp>
         <p:nvSpPr>
-          <p:cNvPr id="1464260514" name="Text 7"/>
+          <p:cNvPr id="148958907" name="Text 7"/>
           <p:cNvSpPr txBox="1"/>
           <p:nvPr/>
         </p:nvSpPr>
@@ -6721,7 +6697,7 @@
       </p:sp>
       <p:sp>
         <p:nvSpPr>
-          <p:cNvPr id="1501772125" name="Text 8"/>
+          <p:cNvPr id="1679544541" name="Text 8"/>
           <p:cNvSpPr txBox="1"/>
           <p:nvPr/>
         </p:nvSpPr>
@@ -6761,7 +6737,7 @@
       </p:sp>
       <p:sp>
         <p:nvSpPr>
-          <p:cNvPr id="1461487928" name="Shape 9"/>
+          <p:cNvPr id="1979055457" name="Shape 9"/>
           <p:cNvSpPr/>
           <p:nvPr/>
         </p:nvSpPr>
@@ -6788,7 +6764,7 @@
       </p:sp>
       <p:sp>
         <p:nvSpPr>
-          <p:cNvPr id="1321026304" name="Text 10"/>
+          <p:cNvPr id="2089227914" name="Text 10"/>
           <p:cNvSpPr txBox="1"/>
           <p:nvPr/>
         </p:nvSpPr>
@@ -6828,7 +6804,7 @@
       </p:sp>
       <p:sp>
         <p:nvSpPr>
-          <p:cNvPr id="1123837182" name="Text 11"/>
+          <p:cNvPr id="127212802" name="Text 11"/>
           <p:cNvSpPr txBox="1"/>
           <p:nvPr/>
         </p:nvSpPr>
@@ -6868,7 +6844,7 @@
       </p:sp>
       <p:sp>
         <p:nvSpPr>
-          <p:cNvPr id="1875115261" name="Shape 12"/>
+          <p:cNvPr id="235401148" name="Shape 12"/>
           <p:cNvSpPr/>
           <p:nvPr/>
         </p:nvSpPr>
@@ -6895,7 +6871,7 @@
       </p:sp>
       <p:sp>
         <p:nvSpPr>
-          <p:cNvPr id="1507998635" name="Text 13"/>
+          <p:cNvPr id="1503302376" name="Text 13"/>
           <p:cNvSpPr txBox="1"/>
           <p:nvPr/>
         </p:nvSpPr>
@@ -6935,7 +6911,7 @@
       </p:sp>
       <p:sp>
         <p:nvSpPr>
-          <p:cNvPr id="1682049159" name="Text 14"/>
+          <p:cNvPr id="1547077379" name="Text 14"/>
           <p:cNvSpPr txBox="1"/>
           <p:nvPr/>
         </p:nvSpPr>
@@ -6975,7 +6951,7 @@
       </p:sp>
       <p:sp>
         <p:nvSpPr>
-          <p:cNvPr id="1083410813" name="Shape 15"/>
+          <p:cNvPr id="1736944094" name="Shape 15"/>
           <p:cNvSpPr/>
           <p:nvPr/>
         </p:nvSpPr>
@@ -7002,7 +6978,7 @@
       </p:sp>
       <p:sp>
         <p:nvSpPr>
-          <p:cNvPr id="796891884" name="Text 16"/>
+          <p:cNvPr id="1387750787" name="Text 16"/>
           <p:cNvSpPr txBox="1"/>
           <p:nvPr/>
         </p:nvSpPr>
@@ -7042,7 +7018,7 @@
       </p:sp>
       <p:sp>
         <p:nvSpPr>
-          <p:cNvPr id="1648712834" name="Text 17"/>
+          <p:cNvPr id="65961501" name="Text 17"/>
           <p:cNvSpPr txBox="1"/>
           <p:nvPr/>
         </p:nvSpPr>
@@ -7082,7 +7058,7 @@
       </p:sp>
       <p:sp>
         <p:nvSpPr>
-          <p:cNvPr id="1334455198" name="Shape 18"/>
+          <p:cNvPr id="2027660694" name="Shape 18"/>
           <p:cNvSpPr/>
           <p:nvPr/>
         </p:nvSpPr>
@@ -7109,7 +7085,7 @@
       </p:sp>
       <p:sp>
         <p:nvSpPr>
-          <p:cNvPr id="978841625" name="Text 19"/>
+          <p:cNvPr id="985478347" name="Text 19"/>
           <p:cNvSpPr txBox="1"/>
           <p:nvPr/>
         </p:nvSpPr>
@@ -7149,7 +7125,7 @@
       </p:sp>
       <p:sp>
         <p:nvSpPr>
-          <p:cNvPr id="741212177" name="Text 20"/>
+          <p:cNvPr id="564140866" name="Text 20"/>
           <p:cNvSpPr txBox="1"/>
           <p:nvPr/>
         </p:nvSpPr>
@@ -7189,7 +7165,7 @@
       </p:sp>
       <p:sp>
         <p:nvSpPr>
-          <p:cNvPr id="1044333919" name="Shape 21"/>
+          <p:cNvPr id="2003975302" name="Shape 21"/>
           <p:cNvSpPr/>
           <p:nvPr/>
         </p:nvSpPr>
@@ -7216,7 +7192,7 @@
       </p:sp>
       <p:sp>
         <p:nvSpPr>
-          <p:cNvPr id="49107802" name="Text 22"/>
+          <p:cNvPr id="1617773016" name="Text 22"/>
           <p:cNvSpPr txBox="1"/>
           <p:nvPr/>
         </p:nvSpPr>
@@ -7256,7 +7232,7 @@
       </p:sp>
       <p:sp>
         <p:nvSpPr>
-          <p:cNvPr id="708081700" name="Text 23"/>
+          <p:cNvPr id="461601065" name="Text 23"/>
           <p:cNvSpPr txBox="1"/>
           <p:nvPr/>
         </p:nvSpPr>
@@ -7296,7 +7272,7 @@
       </p:sp>
       <p:sp>
         <p:nvSpPr>
-          <p:cNvPr id="754459417" name="Shape 24"/>
+          <p:cNvPr id="1491856579" name="Shape 24"/>
           <p:cNvSpPr/>
           <p:nvPr/>
         </p:nvSpPr>
@@ -7323,7 +7299,7 @@
       </p:sp>
       <p:sp>
         <p:nvSpPr>
-          <p:cNvPr id="2001423316" name="Text 25"/>
+          <p:cNvPr id="1111223112" name="Text 25"/>
           <p:cNvSpPr txBox="1"/>
           <p:nvPr/>
         </p:nvSpPr>
@@ -7363,7 +7339,7 @@
       </p:sp>
       <p:sp>
         <p:nvSpPr>
-          <p:cNvPr id="1071738274" name="Text 26"/>
+          <p:cNvPr id="1981399188" name="Text 26"/>
           <p:cNvSpPr txBox="1"/>
           <p:nvPr/>
         </p:nvSpPr>
@@ -7403,7 +7379,7 @@
       </p:sp>
       <p:sp>
         <p:nvSpPr>
-          <p:cNvPr id="23478059" name="Text 27"/>
+          <p:cNvPr id="2129710424" name="Text 27"/>
           <p:cNvSpPr txBox="1"/>
           <p:nvPr/>
         </p:nvSpPr>
@@ -7443,7 +7419,7 @@
       </p:sp>
       <p:sp>
         <p:nvSpPr>
-          <p:cNvPr id="1388027645" name="Shape 28"/>
+          <p:cNvPr id="1194734143" name="Shape 28"/>
           <p:cNvSpPr/>
           <p:nvPr/>
         </p:nvSpPr>
@@ -7468,7 +7444,7 @@
       </p:sp>
       <p:pic>
         <p:nvPicPr>
-          <p:cNvPr id="1751840966" name="Image 0" descr="preencoded.png"/>
+          <p:cNvPr id="1177030555" name="Image 0" descr="preencoded.png"/>
           <p:cNvPicPr>
             <a:picLocks noChangeAspect="1"/>
           </p:cNvPicPr>
@@ -7490,7 +7466,7 @@
       </p:pic>
       <p:sp>
         <p:nvSpPr>
-          <p:cNvPr id="340364239" name="Text 29"/>
+          <p:cNvPr id="324624473" name="Text 29"/>
           <p:cNvSpPr txBox="1"/>
           <p:nvPr/>
         </p:nvSpPr>
@@ -7530,7 +7506,7 @@
       </p:sp>
       <p:sp>
         <p:nvSpPr>
-          <p:cNvPr id="1826021370" name="Text 30"/>
+          <p:cNvPr id="110131597" name="Text 30"/>
           <p:cNvSpPr txBox="1"/>
           <p:nvPr/>
         </p:nvSpPr>
@@ -7570,7 +7546,7 @@
       </p:sp>
       <p:sp>
         <p:nvSpPr>
-          <p:cNvPr id="212145115" name="Shape 31"/>
+          <p:cNvPr id="1689935500" name="Shape 31"/>
           <p:cNvSpPr/>
           <p:nvPr/>
         </p:nvSpPr>
@@ -7595,7 +7571,7 @@
       </p:sp>
       <p:pic>
         <p:nvPicPr>
-          <p:cNvPr id="703078107" name="Image 1" descr="preencoded.png"/>
+          <p:cNvPr id="1831596437" name="Image 1" descr="preencoded.png"/>
           <p:cNvPicPr>
             <a:picLocks noChangeAspect="1"/>
           </p:cNvPicPr>
@@ -7617,7 +7593,7 @@
       </p:pic>
       <p:sp>
         <p:nvSpPr>
-          <p:cNvPr id="232152221" name="Text 32"/>
+          <p:cNvPr id="595208111" name="Text 32"/>
           <p:cNvSpPr txBox="1"/>
           <p:nvPr/>
         </p:nvSpPr>
@@ -7657,7 +7633,7 @@
       </p:sp>
       <p:sp>
         <p:nvSpPr>
-          <p:cNvPr id="2014985796" name="Text 33"/>
+          <p:cNvPr id="1074648370" name="Text 33"/>
           <p:cNvSpPr txBox="1"/>
           <p:nvPr/>
         </p:nvSpPr>
@@ -7697,7 +7673,7 @@
       </p:sp>
       <p:sp>
         <p:nvSpPr>
-          <p:cNvPr id="998573916" name="Shape 34"/>
+          <p:cNvPr id="529238715" name="Shape 34"/>
           <p:cNvSpPr/>
           <p:nvPr/>
         </p:nvSpPr>
@@ -7722,7 +7698,7 @@
       </p:sp>
       <p:pic>
         <p:nvPicPr>
-          <p:cNvPr id="626727292" name="Image 2" descr="preencoded.png"/>
+          <p:cNvPr id="1800025427" name="Image 2" descr="preencoded.png"/>
           <p:cNvPicPr>
             <a:picLocks noChangeAspect="1"/>
           </p:cNvPicPr>
@@ -7744,7 +7720,7 @@
       </p:pic>
       <p:sp>
         <p:nvSpPr>
-          <p:cNvPr id="1579466541" name="Text 35"/>
+          <p:cNvPr id="927365227" name="Text 35"/>
           <p:cNvSpPr txBox="1"/>
           <p:nvPr/>
         </p:nvSpPr>
@@ -7784,7 +7760,7 @@
       </p:sp>
       <p:sp>
         <p:nvSpPr>
-          <p:cNvPr id="329122951" name="Text 36"/>
+          <p:cNvPr id="1981157537" name="Text 36"/>
           <p:cNvSpPr txBox="1"/>
           <p:nvPr/>
         </p:nvSpPr>
@@ -7824,7 +7800,7 @@
       </p:sp>
       <p:sp>
         <p:nvSpPr>
-          <p:cNvPr id="746089085" name="Shape 37"/>
+          <p:cNvPr id="2082436180" name="Shape 37"/>
           <p:cNvSpPr/>
           <p:nvPr/>
         </p:nvSpPr>
@@ -7849,7 +7825,7 @@
       </p:sp>
       <p:pic>
         <p:nvPicPr>
-          <p:cNvPr id="1477087413" name="Image 3" descr="preencoded.png"/>
+          <p:cNvPr id="1890444872" name="Image 3" descr="preencoded.png"/>
           <p:cNvPicPr>
             <a:picLocks noChangeAspect="1"/>
           </p:cNvPicPr>
@@ -7871,7 +7847,7 @@
       </p:pic>
       <p:sp>
         <p:nvSpPr>
-          <p:cNvPr id="734038283" name="Text 38"/>
+          <p:cNvPr id="1714418845" name="Text 38"/>
           <p:cNvSpPr txBox="1"/>
           <p:nvPr/>
         </p:nvSpPr>
@@ -7911,7 +7887,7 @@
       </p:sp>
       <p:sp>
         <p:nvSpPr>
-          <p:cNvPr id="1953692948" name="Text 39"/>
+          <p:cNvPr id="922999640" name="Text 39"/>
           <p:cNvSpPr txBox="1"/>
           <p:nvPr/>
         </p:nvSpPr>
@@ -7951,7 +7927,7 @@
       </p:sp>
       <p:sp>
         <p:nvSpPr>
-          <p:cNvPr id="623476618" name="Shape 40"/>
+          <p:cNvPr id="293178107" name="Shape 40"/>
           <p:cNvSpPr/>
           <p:nvPr/>
         </p:nvSpPr>
@@ -7976,7 +7952,7 @@
       </p:sp>
       <p:pic>
         <p:nvPicPr>
-          <p:cNvPr id="1220659071" name="Image 4" descr="preencoded.png"/>
+          <p:cNvPr id="279102500" name="Image 4" descr="preencoded.png"/>
           <p:cNvPicPr>
             <a:picLocks noChangeAspect="1"/>
           </p:cNvPicPr>
@@ -7998,7 +7974,7 @@
       </p:pic>
       <p:sp>
         <p:nvSpPr>
-          <p:cNvPr id="572323738" name="Text 41"/>
+          <p:cNvPr id="325507904" name="Text 41"/>
           <p:cNvSpPr txBox="1"/>
           <p:nvPr/>
         </p:nvSpPr>
@@ -8038,7 +8014,7 @@
       </p:sp>
       <p:sp>
         <p:nvSpPr>
-          <p:cNvPr id="261768254" name="Text 42"/>
+          <p:cNvPr id="177619830" name="Text 42"/>
           <p:cNvSpPr txBox="1"/>
           <p:nvPr/>
         </p:nvSpPr>
@@ -8078,7 +8054,7 @@
       </p:sp>
       <p:sp>
         <p:nvSpPr>
-          <p:cNvPr id="654786918" name="Text 43"/>
+          <p:cNvPr id="856281359" name="Text 43"/>
           <p:cNvSpPr txBox="1"/>
           <p:nvPr/>
         </p:nvSpPr>
@@ -8158,7 +8134,7 @@
       </p:grpSpPr>
       <p:sp>
         <p:nvSpPr>
-          <p:cNvPr id="821514577" name="Text 0"/>
+          <p:cNvPr id="65846818" name="Text 0"/>
           <p:cNvSpPr txBox="1"/>
           <p:nvPr/>
         </p:nvSpPr>
@@ -8190,7 +8166,7 @@
                 <a:ea typeface="Arial"/>
                 <a:cs typeface="Arial"/>
               </a:rPr>
-              <a:t>CRITERION 4  ·  DISSEMINATION AND ACCESSIBILITY</a:t>
+              <a:t>CRITERION 3  ·  DISSEMINATION AND ACCESSIBILITY</a:t>
             </a:r>
             <a:endParaRPr lang="en-US" sz="1200"/>
           </a:p>
@@ -8198,7 +8174,7 @@
       </p:sp>
       <p:sp>
         <p:nvSpPr>
-          <p:cNvPr id="526986024" name="Text 1"/>
+          <p:cNvPr id="1282150967" name="Text 1"/>
           <p:cNvSpPr txBox="1"/>
           <p:nvPr/>
         </p:nvSpPr>
@@ -8238,7 +8214,7 @@
       </p:sp>
       <p:sp>
         <p:nvSpPr>
-          <p:cNvPr id="17676432" name="Text 2"/>
+          <p:cNvPr id="1235783752" name="Text 2"/>
           <p:cNvSpPr txBox="1"/>
           <p:nvPr/>
         </p:nvSpPr>
@@ -8278,7 +8254,7 @@
       </p:sp>
       <p:sp>
         <p:nvSpPr>
-          <p:cNvPr id="2053009734" name="Shape 3"/>
+          <p:cNvPr id="771411401" name="Shape 3"/>
           <p:cNvSpPr/>
           <p:nvPr/>
         </p:nvSpPr>
@@ -8303,7 +8279,7 @@
       </p:sp>
       <p:pic>
         <p:nvPicPr>
-          <p:cNvPr id="1345402624" name="Image 0" descr="preencoded.png"/>
+          <p:cNvPr id="1202014345" name="Image 0" descr="preencoded.png"/>
           <p:cNvPicPr>
             <a:picLocks noChangeAspect="1"/>
           </p:cNvPicPr>
@@ -8325,7 +8301,7 @@
       </p:pic>
       <p:sp>
         <p:nvSpPr>
-          <p:cNvPr id="650609673" name="Text 4"/>
+          <p:cNvPr id="745286768" name="Text 4"/>
           <p:cNvSpPr txBox="1"/>
           <p:nvPr/>
         </p:nvSpPr>
@@ -8365,7 +8341,7 @@
       </p:sp>
       <p:sp>
         <p:nvSpPr>
-          <p:cNvPr id="1016542983" name="Text 5"/>
+          <p:cNvPr id="1062028488" name="Text 5"/>
           <p:cNvSpPr txBox="1"/>
           <p:nvPr/>
         </p:nvSpPr>
@@ -8405,7 +8381,7 @@
       </p:sp>
       <p:sp>
         <p:nvSpPr>
-          <p:cNvPr id="665350833" name="Shape 6"/>
+          <p:cNvPr id="44003024" name="Shape 6"/>
           <p:cNvSpPr/>
           <p:nvPr/>
         </p:nvSpPr>
@@ -8430,7 +8406,7 @@
       </p:sp>
       <p:pic>
         <p:nvPicPr>
-          <p:cNvPr id="1799483741" name="Image 1" descr="preencoded.png"/>
+          <p:cNvPr id="1657016920" name="Image 1" descr="preencoded.png"/>
           <p:cNvPicPr>
             <a:picLocks noChangeAspect="1"/>
           </p:cNvPicPr>
@@ -8452,7 +8428,7 @@
       </p:pic>
       <p:sp>
         <p:nvSpPr>
-          <p:cNvPr id="1282152404" name="Text 7"/>
+          <p:cNvPr id="1723021079" name="Text 7"/>
           <p:cNvSpPr txBox="1"/>
           <p:nvPr/>
         </p:nvSpPr>
@@ -8492,7 +8468,7 @@
       </p:sp>
       <p:sp>
         <p:nvSpPr>
-          <p:cNvPr id="1971728673" name="Text 8"/>
+          <p:cNvPr id="2071639026" name="Text 8"/>
           <p:cNvSpPr txBox="1"/>
           <p:nvPr/>
         </p:nvSpPr>
@@ -8532,7 +8508,7 @@
       </p:sp>
       <p:sp>
         <p:nvSpPr>
-          <p:cNvPr id="879106574" name="Shape 9"/>
+          <p:cNvPr id="1535061304" name="Shape 9"/>
           <p:cNvSpPr/>
           <p:nvPr/>
         </p:nvSpPr>
@@ -8557,7 +8533,7 @@
       </p:sp>
       <p:pic>
         <p:nvPicPr>
-          <p:cNvPr id="45642490" name="Image 2" descr="preencoded.png"/>
+          <p:cNvPr id="969655311" name="Image 2" descr="preencoded.png"/>
           <p:cNvPicPr>
             <a:picLocks noChangeAspect="1"/>
           </p:cNvPicPr>
@@ -8579,7 +8555,7 @@
       </p:pic>
       <p:sp>
         <p:nvSpPr>
-          <p:cNvPr id="1661860503" name="Text 10"/>
+          <p:cNvPr id="365100399" name="Text 10"/>
           <p:cNvSpPr txBox="1"/>
           <p:nvPr/>
         </p:nvSpPr>
@@ -8619,7 +8595,7 @@
       </p:sp>
       <p:sp>
         <p:nvSpPr>
-          <p:cNvPr id="29386536" name="Text 11"/>
+          <p:cNvPr id="869166410" name="Text 11"/>
           <p:cNvSpPr txBox="1"/>
           <p:nvPr/>
         </p:nvSpPr>
@@ -8659,7 +8635,7 @@
       </p:sp>
       <p:sp>
         <p:nvSpPr>
-          <p:cNvPr id="935546942" name="Shape 12"/>
+          <p:cNvPr id="58442666" name="Shape 12"/>
           <p:cNvSpPr/>
           <p:nvPr/>
         </p:nvSpPr>
@@ -8684,7 +8660,7 @@
       </p:sp>
       <p:pic>
         <p:nvPicPr>
-          <p:cNvPr id="969442474" name="Image 3" descr="preencoded.png"/>
+          <p:cNvPr id="1353164877" name="Image 3" descr="preencoded.png"/>
           <p:cNvPicPr>
             <a:picLocks noChangeAspect="1"/>
           </p:cNvPicPr>
@@ -8706,7 +8682,7 @@
       </p:pic>
       <p:sp>
         <p:nvSpPr>
-          <p:cNvPr id="837310082" name="Text 13"/>
+          <p:cNvPr id="1669155290" name="Text 13"/>
           <p:cNvSpPr txBox="1"/>
           <p:nvPr/>
         </p:nvSpPr>
@@ -8746,7 +8722,7 @@
       </p:sp>
       <p:sp>
         <p:nvSpPr>
-          <p:cNvPr id="329047206" name="Text 14"/>
+          <p:cNvPr id="1275061327" name="Text 14"/>
           <p:cNvSpPr txBox="1"/>
           <p:nvPr/>
         </p:nvSpPr>
@@ -8786,7 +8762,7 @@
       </p:sp>
       <p:sp>
         <p:nvSpPr>
-          <p:cNvPr id="1976740789" name="Shape 15"/>
+          <p:cNvPr id="587573448" name="Shape 15"/>
           <p:cNvSpPr/>
           <p:nvPr/>
         </p:nvSpPr>
@@ -8811,7 +8787,7 @@
       </p:sp>
       <p:pic>
         <p:nvPicPr>
-          <p:cNvPr id="2122365031" name="Image 4" descr="preencoded.png"/>
+          <p:cNvPr id="414504826" name="Image 4" descr="preencoded.png"/>
           <p:cNvPicPr>
             <a:picLocks noChangeAspect="1"/>
           </p:cNvPicPr>
@@ -8833,7 +8809,7 @@
       </p:pic>
       <p:sp>
         <p:nvSpPr>
-          <p:cNvPr id="222610924" name="Text 16"/>
+          <p:cNvPr id="1953561426" name="Text 16"/>
           <p:cNvSpPr txBox="1"/>
           <p:nvPr/>
         </p:nvSpPr>
@@ -8873,7 +8849,7 @@
       </p:sp>
       <p:sp>
         <p:nvSpPr>
-          <p:cNvPr id="1864142028" name="Text 17"/>
+          <p:cNvPr id="1831870464" name="Text 17"/>
           <p:cNvSpPr txBox="1"/>
           <p:nvPr/>
         </p:nvSpPr>
@@ -8913,7 +8889,7 @@
       </p:sp>
       <p:sp>
         <p:nvSpPr>
-          <p:cNvPr id="981330206" name="Shape 18"/>
+          <p:cNvPr id="1901802121" name="Shape 18"/>
           <p:cNvSpPr/>
           <p:nvPr/>
         </p:nvSpPr>
@@ -8940,7 +8916,7 @@
       </p:sp>
       <p:sp>
         <p:nvSpPr>
-          <p:cNvPr id="1188521683" name="Text 19"/>
+          <p:cNvPr id="1065459174" name="Text 19"/>
           <p:cNvSpPr txBox="1"/>
           <p:nvPr/>
         </p:nvSpPr>
@@ -8980,7 +8956,7 @@
       </p:sp>
       <p:sp>
         <p:nvSpPr>
-          <p:cNvPr id="364820069" name="Shape 20"/>
+          <p:cNvPr id="1431866807" name="Shape 20"/>
           <p:cNvSpPr/>
           <p:nvPr/>
         </p:nvSpPr>
@@ -9005,7 +8981,7 @@
       </p:sp>
       <p:sp>
         <p:nvSpPr>
-          <p:cNvPr id="1975725801" name="Text 21"/>
+          <p:cNvPr id="861524978" name="Text 21"/>
           <p:cNvSpPr txBox="1"/>
           <p:nvPr/>
         </p:nvSpPr>
@@ -9045,7 +9021,7 @@
       </p:sp>
       <p:sp>
         <p:nvSpPr>
-          <p:cNvPr id="409139547" name="Text 22"/>
+          <p:cNvPr id="1250207674" name="Text 22"/>
           <p:cNvSpPr txBox="1"/>
           <p:nvPr/>
         </p:nvSpPr>
@@ -9085,7 +9061,7 @@
       </p:sp>
       <p:sp>
         <p:nvSpPr>
-          <p:cNvPr id="1685658494" name="Text 23"/>
+          <p:cNvPr id="355392566" name="Text 23"/>
           <p:cNvSpPr txBox="1"/>
           <p:nvPr/>
         </p:nvSpPr>
@@ -9125,7 +9101,7 @@
       </p:sp>
       <p:sp>
         <p:nvSpPr>
-          <p:cNvPr id="544706535" name="Shape 24"/>
+          <p:cNvPr id="50890272" name="Shape 24"/>
           <p:cNvSpPr/>
           <p:nvPr/>
         </p:nvSpPr>
@@ -9150,7 +9126,7 @@
       </p:sp>
       <p:sp>
         <p:nvSpPr>
-          <p:cNvPr id="1079258328" name="Text 25"/>
+          <p:cNvPr id="1864385755" name="Text 25"/>
           <p:cNvSpPr txBox="1"/>
           <p:nvPr/>
         </p:nvSpPr>
@@ -9190,7 +9166,7 @@
       </p:sp>
       <p:sp>
         <p:nvSpPr>
-          <p:cNvPr id="278537690" name="Text 26"/>
+          <p:cNvPr id="1189620895" name="Text 26"/>
           <p:cNvSpPr txBox="1"/>
           <p:nvPr/>
         </p:nvSpPr>
@@ -9230,7 +9206,7 @@
       </p:sp>
       <p:sp>
         <p:nvSpPr>
-          <p:cNvPr id="2039392172" name="Text 27"/>
+          <p:cNvPr id="1384991323" name="Text 27"/>
           <p:cNvSpPr txBox="1"/>
           <p:nvPr/>
         </p:nvSpPr>
@@ -9270,7 +9246,7 @@
       </p:sp>
       <p:sp>
         <p:nvSpPr>
-          <p:cNvPr id="1812652603" name="Shape 28"/>
+          <p:cNvPr id="972157670" name="Shape 28"/>
           <p:cNvSpPr/>
           <p:nvPr/>
         </p:nvSpPr>
@@ -9295,7 +9271,7 @@
       </p:sp>
       <p:sp>
         <p:nvSpPr>
-          <p:cNvPr id="1201138536" name="Text 29"/>
+          <p:cNvPr id="1104362885" name="Text 29"/>
           <p:cNvSpPr txBox="1"/>
           <p:nvPr/>
         </p:nvSpPr>
@@ -9335,7 +9311,7 @@
       </p:sp>
       <p:sp>
         <p:nvSpPr>
-          <p:cNvPr id="1961452968" name="Text 30"/>
+          <p:cNvPr id="255548325" name="Text 30"/>
           <p:cNvSpPr txBox="1"/>
           <p:nvPr/>
         </p:nvSpPr>
@@ -9375,7 +9351,7 @@
       </p:sp>
       <p:sp>
         <p:nvSpPr>
-          <p:cNvPr id="713771662" name="Text 31"/>
+          <p:cNvPr id="2097951617" name="Text 31"/>
           <p:cNvSpPr txBox="1"/>
           <p:nvPr/>
         </p:nvSpPr>
@@ -9415,7 +9391,7 @@
       </p:sp>
       <p:sp>
         <p:nvSpPr>
-          <p:cNvPr id="1752717171" name="Shape 32"/>
+          <p:cNvPr id="1919454655" name="Shape 32"/>
           <p:cNvSpPr/>
           <p:nvPr/>
         </p:nvSpPr>
@@ -9440,7 +9416,7 @@
       </p:sp>
       <p:sp>
         <p:nvSpPr>
-          <p:cNvPr id="882018835" name="Text 33"/>
+          <p:cNvPr id="1001345603" name="Text 33"/>
           <p:cNvSpPr txBox="1"/>
           <p:nvPr/>
         </p:nvSpPr>
@@ -9480,7 +9456,7 @@
       </p:sp>
       <p:sp>
         <p:nvSpPr>
-          <p:cNvPr id="422316842" name="Text 34"/>
+          <p:cNvPr id="495517297" name="Text 34"/>
           <p:cNvSpPr txBox="1"/>
           <p:nvPr/>
         </p:nvSpPr>
@@ -9520,7 +9496,7 @@
       </p:sp>
       <p:sp>
         <p:nvSpPr>
-          <p:cNvPr id="887379439" name="Text 35"/>
+          <p:cNvPr id="1307721068" name="Text 35"/>
           <p:cNvSpPr txBox="1"/>
           <p:nvPr/>
         </p:nvSpPr>
@@ -9560,7 +9536,7 @@
       </p:sp>
       <p:sp>
         <p:nvSpPr>
-          <p:cNvPr id="534337914" name="Shape 36"/>
+          <p:cNvPr id="1483628191" name="Shape 36"/>
           <p:cNvSpPr/>
           <p:nvPr/>
         </p:nvSpPr>
@@ -9585,7 +9561,7 @@
       </p:sp>
       <p:sp>
         <p:nvSpPr>
-          <p:cNvPr id="137739384" name="Text 37"/>
+          <p:cNvPr id="572186033" name="Text 37"/>
           <p:cNvSpPr txBox="1"/>
           <p:nvPr/>
         </p:nvSpPr>
@@ -9625,7 +9601,7 @@
       </p:sp>
       <p:sp>
         <p:nvSpPr>
-          <p:cNvPr id="1408903306" name="Text 38"/>
+          <p:cNvPr id="1186175098" name="Text 38"/>
           <p:cNvSpPr txBox="1"/>
           <p:nvPr/>
         </p:nvSpPr>
@@ -9665,7 +9641,7 @@
       </p:sp>
       <p:sp>
         <p:nvSpPr>
-          <p:cNvPr id="2109899163" name="Text 39"/>
+          <p:cNvPr id="41335502" name="Text 39"/>
           <p:cNvSpPr txBox="1"/>
           <p:nvPr/>
         </p:nvSpPr>
@@ -9705,7 +9681,7 @@
       </p:sp>
       <p:sp>
         <p:nvSpPr>
-          <p:cNvPr id="425647502" name="Shape 40"/>
+          <p:cNvPr id="609607774" name="Shape 40"/>
           <p:cNvSpPr/>
           <p:nvPr/>
         </p:nvSpPr>
@@ -9730,7 +9706,7 @@
       </p:sp>
       <p:sp>
         <p:nvSpPr>
-          <p:cNvPr id="1166338705" name="Text 41"/>
+          <p:cNvPr id="491450616" name="Text 41"/>
           <p:cNvSpPr txBox="1"/>
           <p:nvPr/>
         </p:nvSpPr>
@@ -9770,7 +9746,7 @@
       </p:sp>
       <p:sp>
         <p:nvSpPr>
-          <p:cNvPr id="1119959957" name="Text 42"/>
+          <p:cNvPr id="1802866194" name="Text 42"/>
           <p:cNvSpPr txBox="1"/>
           <p:nvPr/>
         </p:nvSpPr>
@@ -9810,7 +9786,7 @@
       </p:sp>
       <p:sp>
         <p:nvSpPr>
-          <p:cNvPr id="496409035" name="Text 43"/>
+          <p:cNvPr id="1009785799" name="Text 43"/>
           <p:cNvSpPr txBox="1"/>
           <p:nvPr/>
         </p:nvSpPr>
@@ -9850,7 +9826,7 @@
       </p:sp>
       <p:sp>
         <p:nvSpPr>
-          <p:cNvPr id="995678675" name="Text 44"/>
+          <p:cNvPr id="1944098591" name="Text 44"/>
           <p:cNvSpPr txBox="1"/>
           <p:nvPr/>
         </p:nvSpPr>
@@ -9930,7 +9906,7 @@
       </p:grpSpPr>
       <p:sp>
         <p:nvSpPr>
-          <p:cNvPr id="958389271" name="Text 0"/>
+          <p:cNvPr id="171178151" name="Text 0"/>
           <p:cNvSpPr txBox="1"/>
           <p:nvPr/>
         </p:nvSpPr>
@@ -9970,7 +9946,7 @@
       </p:sp>
       <p:sp>
         <p:nvSpPr>
-          <p:cNvPr id="958159467" name="Shape 1"/>
+          <p:cNvPr id="1701377700" name="Shape 1"/>
           <p:cNvSpPr/>
           <p:nvPr/>
         </p:nvSpPr>
@@ -9997,7 +9973,7 @@
       </p:sp>
       <p:sp>
         <p:nvSpPr>
-          <p:cNvPr id="531949938" name="Text 2"/>
+          <p:cNvPr id="1227612688" name="Text 2"/>
           <p:cNvSpPr txBox="1"/>
           <p:nvPr/>
         </p:nvSpPr>
@@ -10037,7 +10013,7 @@
       </p:sp>
       <p:sp>
         <p:nvSpPr>
-          <p:cNvPr id="1885653539" name="Text 3"/>
+          <p:cNvPr id="1934929996" name="Text 3"/>
           <p:cNvSpPr txBox="1"/>
           <p:nvPr/>
         </p:nvSpPr>
@@ -10077,7 +10053,7 @@
       </p:sp>
       <p:sp>
         <p:nvSpPr>
-          <p:cNvPr id="900774803" name="Shape 4"/>
+          <p:cNvPr id="2122137845" name="Shape 4"/>
           <p:cNvSpPr/>
           <p:nvPr/>
         </p:nvSpPr>
@@ -10104,7 +10080,7 @@
       </p:sp>
       <p:sp>
         <p:nvSpPr>
-          <p:cNvPr id="329151636" name="Text 5"/>
+          <p:cNvPr id="1718473855" name="Text 5"/>
           <p:cNvSpPr txBox="1"/>
           <p:nvPr/>
         </p:nvSpPr>
@@ -10144,7 +10120,7 @@
       </p:sp>
       <p:sp>
         <p:nvSpPr>
-          <p:cNvPr id="1037335108" name="Text 6"/>
+          <p:cNvPr id="820037518" name="Text 6"/>
           <p:cNvSpPr txBox="1"/>
           <p:nvPr/>
         </p:nvSpPr>
@@ -10184,7 +10160,7 @@
       </p:sp>
       <p:sp>
         <p:nvSpPr>
-          <p:cNvPr id="367830060" name="Shape 7"/>
+          <p:cNvPr id="1634508517" name="Shape 7"/>
           <p:cNvSpPr/>
           <p:nvPr/>
         </p:nvSpPr>
@@ -10211,7 +10187,7 @@
       </p:sp>
       <p:sp>
         <p:nvSpPr>
-          <p:cNvPr id="572401551" name="Text 8"/>
+          <p:cNvPr id="740285004" name="Text 8"/>
           <p:cNvSpPr txBox="1"/>
           <p:nvPr/>
         </p:nvSpPr>
@@ -10251,7 +10227,7 @@
       </p:sp>
       <p:sp>
         <p:nvSpPr>
-          <p:cNvPr id="1405708071" name="Text 9"/>
+          <p:cNvPr id="1586450123" name="Text 9"/>
           <p:cNvSpPr txBox="1"/>
           <p:nvPr/>
         </p:nvSpPr>
@@ -10291,7 +10267,7 @@
       </p:sp>
       <p:sp>
         <p:nvSpPr>
-          <p:cNvPr id="268533150" name="Shape 10"/>
+          <p:cNvPr id="690472167" name="Shape 10"/>
           <p:cNvSpPr/>
           <p:nvPr/>
         </p:nvSpPr>
@@ -10318,7 +10294,7 @@
       </p:sp>
       <p:sp>
         <p:nvSpPr>
-          <p:cNvPr id="957118564" name="Text 11"/>
+          <p:cNvPr id="196830147" name="Text 11"/>
           <p:cNvSpPr txBox="1"/>
           <p:nvPr/>
         </p:nvSpPr>
@@ -10358,7 +10334,7 @@
       </p:sp>
       <p:sp>
         <p:nvSpPr>
-          <p:cNvPr id="345422906" name="Text 12"/>
+          <p:cNvPr id="1659274814" name="Text 12"/>
           <p:cNvSpPr txBox="1"/>
           <p:nvPr/>
         </p:nvSpPr>
@@ -10398,7 +10374,7 @@
       </p:sp>
       <p:sp>
         <p:nvSpPr>
-          <p:cNvPr id="241395264" name="Text 13"/>
+          <p:cNvPr id="1004425500" name="Text 13"/>
           <p:cNvSpPr txBox="1"/>
           <p:nvPr/>
         </p:nvSpPr>
@@ -10438,7 +10414,7 @@
       </p:sp>
       <p:sp>
         <p:nvSpPr>
-          <p:cNvPr id="1827551065" name="Text 14"/>
+          <p:cNvPr id="988243416" name="Text 14"/>
           <p:cNvSpPr txBox="1"/>
           <p:nvPr/>
         </p:nvSpPr>
@@ -10526,7 +10502,7 @@
       </p:sp>
       <p:sp>
         <p:nvSpPr>
-          <p:cNvPr id="963084557" name="Text 15"/>
+          <p:cNvPr id="1825041067" name="Text 15"/>
           <p:cNvSpPr txBox="1"/>
           <p:nvPr/>
         </p:nvSpPr>
